--- a/docs/academic/Sustentacion-IaC-50-Sucursales.pptx
+++ b/docs/academic/Sustentacion-IaC-50-Sucursales.pptx
@@ -24,9 +24,11 @@
     <p:sldId id="272" r:id="rId18"/>
     <p:sldId id="273" r:id="rId19"/>
     <p:sldId id="274" r:id="rId20"/>
+    <p:sldId id="275" r:id="rId21"/>
+    <p:sldId id="276" r:id="rId22"/>
   </p:sldIdLst>
   <p:notesMasterIdLst>
-    <p:notesMasterId r:id="rId21"/>
+    <p:notesMasterId r:id="rId23"/>
   </p:notesMasterIdLst>
   <p:sldSz cx="9144000" cy="5143500"/>
   <p:notesSz cx="5143500" cy="9144000"/>
@@ -125,47 +127,53 @@
   <p:extLst>
     <p:ext uri="{521415D9-36F7-43E2-AB2F-B90AF26B5E84}">
       <p14:sectionLst xmlns:p14="http://schemas.microsoft.com/office/powerpoint/2010/main">
-        <p14:section name="Inicio" id="{ddf67193-ea7b-581a-2e53-1ff1e7782a96}">
+        <p14:section name="Inicio" id="{c6a90a92-6830-1306-c31b-6edecbd20fec}">
           <p14:sldIdLst>
             <p14:sldId id="256"/>
             <p14:sldId id="257"/>
           </p14:sldIdLst>
         </p14:section>
-        <p14:section name="01 Arquitectura" id="{c293b730-867f-ce09-7625-58a29de7e2f5}">
+        <p14:section name="01 Arquitectura" id="{6b26d4e6-1dc8-e92f-80c9-098ceb1e357f}">
           <p14:sldIdLst>
             <p14:sldId id="258"/>
             <p14:sldId id="259"/>
             <p14:sldId id="260"/>
           </p14:sldIdLst>
         </p14:section>
-        <p14:section name="02 AWS" id="{1cfe328f-78cc-5a15-af21-704868268d69}">
+        <p14:section name="02 AWS" id="{cb5b761c-8a7a-1ac5-c433-09f4d271c845}">
           <p14:sldIdLst>
             <p14:sldId id="261"/>
             <p14:sldId id="262"/>
             <p14:sldId id="263"/>
           </p14:sldIdLst>
         </p14:section>
-        <p14:section name="03 GCP" id="{17502361-b39c-0621-a8a8-a75444b36e3f}">
+        <p14:section name="03 GCP" id="{d4207d7a-f639-bf65-97df-1c3550e29d59}">
           <p14:sldIdLst>
             <p14:sldId id="264"/>
             <p14:sldId id="265"/>
             <p14:sldId id="266"/>
           </p14:sldIdLst>
         </p14:section>
-        <p14:section name="04 CI/CD" id="{37e61bba-5e60-0e87-7d91-55450e19066b}">
+        <p14:section name="04 CI/CD" id="{cca9b098-10ea-f1b0-a558-d87d3ee92735}">
           <p14:sldIdLst>
             <p14:sldId id="267"/>
             <p14:sldId id="268"/>
             <p14:sldId id="269"/>
           </p14:sldIdLst>
         </p14:section>
-        <p14:section name="05 State y Drift" id="{01c5b005-1483-0d2d-541f-dad174e31e27}">
+        <p14:section name="05 State y Drift" id="{765ca2b6-34dd-ed2c-70a0-3f31d66a2bbe}">
           <p14:sldIdLst>
             <p14:sldId id="270"/>
             <p14:sldId id="271"/>
             <p14:sldId id="272"/>
             <p14:sldId id="273"/>
             <p14:sldId id="274"/>
+          </p14:sldIdLst>
+        </p14:section>
+        <p14:section name="Anexos" id="{c97a63f0-f1a1-677f-f353-36acfef56440}">
+          <p14:sldIdLst>
+            <p14:sldId id="275"/>
+            <p14:sldId id="276"/>
           </p14:sldIdLst>
         </p14:section>
       </p14:sectionLst>
@@ -1582,6 +1590,182 @@
 </p:notes>
 </file>
 
+<file path=ppt/notesSlides/notesSlide20.xml><?xml version="1.0" encoding="utf-8"?>
+<p:notes xmlns:a="http://schemas.openxmlformats.org/drawingml/2006/main" xmlns:r="http://schemas.openxmlformats.org/officeDocument/2006/relationships" xmlns:p="http://schemas.openxmlformats.org/presentationml/2006/main">
+  <p:cSld>
+    <p:spTree>
+      <p:nvGrpSpPr>
+        <p:cNvPr id="1" name=""/>
+        <p:cNvGrpSpPr/>
+        <p:nvPr/>
+      </p:nvGrpSpPr>
+      <p:grpSpPr>
+        <a:xfrm>
+          <a:off x="0" y="0"/>
+          <a:ext cx="0" cy="0"/>
+          <a:chOff x="0" y="0"/>
+          <a:chExt cx="0" cy="0"/>
+        </a:xfrm>
+      </p:grpSpPr>
+      <p:sp>
+        <p:nvSpPr>
+          <p:cNvPr id="2" name="Slide Image Placeholder 1"/>
+          <p:cNvSpPr>
+            <a:spLocks noGrp="1" noRot="1" noChangeAspect="1"/>
+          </p:cNvSpPr>
+          <p:nvPr>
+            <p:ph type="sldImg"/>
+          </p:nvPr>
+        </p:nvSpPr>
+        <p:spPr/>
+      </p:sp>
+      <p:sp>
+        <p:nvSpPr>
+          <p:cNvPr id="3" name="Notes Placeholder 2"/>
+          <p:cNvSpPr>
+            <a:spLocks noGrp="1"/>
+          </p:cNvSpPr>
+          <p:nvPr>
+            <p:ph type="body" idx="1"/>
+          </p:nvPr>
+        </p:nvSpPr>
+        <p:spPr/>
+        <p:txBody>
+          <a:bodyPr/>
+          <a:lstStyle/>
+          <a:p>
+            <a:r>
+              <a:rPr lang="en-US" dirty="0"/>
+              <a:t>Anexo de apoyo: no se expone; sirve para responder preguntas del docente sobre terminología.</a:t>
+            </a:r>
+            <a:endParaRPr lang="en-US" dirty="0"/>
+          </a:p>
+        </p:txBody>
+      </p:sp>
+      <p:sp>
+        <p:nvSpPr>
+          <p:cNvPr id="4" name="Slide Number Placeholder 3"/>
+          <p:cNvSpPr>
+            <a:spLocks noGrp="1"/>
+          </p:cNvSpPr>
+          <p:nvPr>
+            <p:ph type="sldNum" sz="quarter" idx="10"/>
+          </p:nvPr>
+        </p:nvSpPr>
+        <p:spPr/>
+        <p:txBody>
+          <a:bodyPr/>
+          <a:lstStyle/>
+          <a:p>
+            <a:fld id="{F7021451-1387-4CA6-816F-3879F97B5CBC}" type="slidenum">
+              <a:rPr lang="en-US"/>
+              <a:t>20</a:t>
+            </a:fld>
+            <a:endParaRPr lang="en-US"/>
+          </a:p>
+        </p:txBody>
+      </p:sp>
+    </p:spTree>
+    <p:extLst>
+      <p:ext uri="{BB962C8B-B14F-4D97-AF65-F5344CB8AC3E}">
+        <p14:creationId xmlns:p14="http://schemas.microsoft.com/office/powerpoint/2010/main" val="1024086991"/>
+      </p:ext>
+    </p:extLst>
+  </p:cSld>
+  <p:clrMapOvr>
+    <a:masterClrMapping/>
+  </p:clrMapOvr>
+</p:notes>
+</file>
+
+<file path=ppt/notesSlides/notesSlide21.xml><?xml version="1.0" encoding="utf-8"?>
+<p:notes xmlns:a="http://schemas.openxmlformats.org/drawingml/2006/main" xmlns:r="http://schemas.openxmlformats.org/officeDocument/2006/relationships" xmlns:p="http://schemas.openxmlformats.org/presentationml/2006/main">
+  <p:cSld>
+    <p:spTree>
+      <p:nvGrpSpPr>
+        <p:cNvPr id="1" name=""/>
+        <p:cNvGrpSpPr/>
+        <p:nvPr/>
+      </p:nvGrpSpPr>
+      <p:grpSpPr>
+        <a:xfrm>
+          <a:off x="0" y="0"/>
+          <a:ext cx="0" cy="0"/>
+          <a:chOff x="0" y="0"/>
+          <a:chExt cx="0" cy="0"/>
+        </a:xfrm>
+      </p:grpSpPr>
+      <p:sp>
+        <p:nvSpPr>
+          <p:cNvPr id="2" name="Slide Image Placeholder 1"/>
+          <p:cNvSpPr>
+            <a:spLocks noGrp="1" noRot="1" noChangeAspect="1"/>
+          </p:cNvSpPr>
+          <p:nvPr>
+            <p:ph type="sldImg"/>
+          </p:nvPr>
+        </p:nvSpPr>
+        <p:spPr/>
+      </p:sp>
+      <p:sp>
+        <p:nvSpPr>
+          <p:cNvPr id="3" name="Notes Placeholder 2"/>
+          <p:cNvSpPr>
+            <a:spLocks noGrp="1"/>
+          </p:cNvSpPr>
+          <p:nvPr>
+            <p:ph type="body" idx="1"/>
+          </p:nvPr>
+        </p:nvSpPr>
+        <p:spPr/>
+        <p:txBody>
+          <a:bodyPr/>
+          <a:lstStyle/>
+          <a:p>
+            <a:r>
+              <a:rPr lang="en-US" dirty="0"/>
+              <a:t>Anexo de apoyo para la ronda de preguntas. Cada integrante responde las de su frente.</a:t>
+            </a:r>
+            <a:endParaRPr lang="en-US" dirty="0"/>
+          </a:p>
+        </p:txBody>
+      </p:sp>
+      <p:sp>
+        <p:nvSpPr>
+          <p:cNvPr id="4" name="Slide Number Placeholder 3"/>
+          <p:cNvSpPr>
+            <a:spLocks noGrp="1"/>
+          </p:cNvSpPr>
+          <p:nvPr>
+            <p:ph type="sldNum" sz="quarter" idx="10"/>
+          </p:nvPr>
+        </p:nvSpPr>
+        <p:spPr/>
+        <p:txBody>
+          <a:bodyPr/>
+          <a:lstStyle/>
+          <a:p>
+            <a:fld id="{F7021451-1387-4CA6-816F-3879F97B5CBC}" type="slidenum">
+              <a:rPr lang="en-US"/>
+              <a:t>21</a:t>
+            </a:fld>
+            <a:endParaRPr lang="en-US"/>
+          </a:p>
+        </p:txBody>
+      </p:sp>
+    </p:spTree>
+    <p:extLst>
+      <p:ext uri="{BB962C8B-B14F-4D97-AF65-F5344CB8AC3E}">
+        <p14:creationId xmlns:p14="http://schemas.microsoft.com/office/powerpoint/2010/main" val="1024086991"/>
+      </p:ext>
+    </p:extLst>
+  </p:cSld>
+  <p:clrMapOvr>
+    <a:masterClrMapping/>
+  </p:clrMapOvr>
+</p:notes>
+</file>
+
 <file path=ppt/notesSlides/notesSlide3.xml><?xml version="1.0" encoding="utf-8"?>
 <p:notes xmlns:a="http://schemas.openxmlformats.org/drawingml/2006/main" xmlns:r="http://schemas.openxmlformats.org/officeDocument/2006/relationships" xmlns:p="http://schemas.openxmlformats.org/presentationml/2006/main">
   <p:cSld>
@@ -5699,7 +5883,7 @@
                 <a:ea typeface="Courier New" pitchFamily="34" charset="-122"/>
                 <a:cs typeface="Courier New" pitchFamily="34" charset="-120"/>
               </a:rPr>
-              <a:t>compute_instance</a:t>
+              <a:t>VM instance</a:t>
             </a:r>
             <a:endParaRPr lang="en-US" sz="1200" dirty="0"/>
           </a:p>
@@ -5803,7 +5987,7 @@
                 <a:ea typeface="Courier New" pitchFamily="34" charset="-122"/>
                 <a:cs typeface="Courier New" pitchFamily="34" charset="-120"/>
               </a:rPr>
-              <a:t>compute_instance</a:t>
+              <a:t>VM instance</a:t>
             </a:r>
             <a:endParaRPr lang="en-US" sz="1200" dirty="0"/>
           </a:p>
@@ -6177,7 +6361,7 @@
                   <a:srgbClr val="57606A"/>
                 </a:solidFill>
               </a:rPr>
-              <a:t>VM</a:t>
+              <a:t>servidores VM</a:t>
             </a:r>
             <a:endParaRPr lang="en-US" sz="1050" dirty="0"/>
           </a:p>
@@ -6276,7 +6460,7 @@
                   <a:srgbClr val="57606A"/>
                 </a:solidFill>
               </a:rPr>
-              <a:t>firewall</a:t>
+              <a:t>reglas de firewall</a:t>
             </a:r>
             <a:endParaRPr lang="en-US" sz="1050" dirty="0"/>
           </a:p>
@@ -7797,7 +7981,7 @@
                 <a:ea typeface="Courier New" pitchFamily="34" charset="-122"/>
                 <a:cs typeface="Courier New" pitchFamily="34" charset="-120"/>
               </a:rPr>
-              <a:t>terraform test  (extracto real)</a:t>
+              <a:t>terraform test  (extracto del log)</a:t>
             </a:r>
             <a:endParaRPr lang="en-US" sz="900" dirty="0"/>
           </a:p>
@@ -13196,7 +13380,7 @@
                 <a:ea typeface="Courier New" pitchFamily="34" charset="-122"/>
                 <a:cs typeface="Courier New" pitchFamily="34" charset="-120"/>
               </a:rPr>
-              <a:t>lab/drift · run_drift_demo.ps1  (extracto real)</a:t>
+              <a:t>lab/drift · run_drift_demo.ps1  (extracto del log)</a:t>
             </a:r>
             <a:endParaRPr lang="en-US" sz="900" dirty="0"/>
           </a:p>
@@ -13596,7 +13780,7 @@
                   <a:schemeClr val="tx1"/>
                 </a:solidFill>
               </a:rPr>
-              <a:t>Todo lo prometido, probado con evidencia real</a:t>
+              <a:t>Resultados de las pruebas</a:t>
             </a:r>
             <a:endParaRPr lang="en-US" sz="2600" dirty="0"/>
           </a:p>
@@ -14096,7 +14280,7 @@
                   <a:srgbClr val="1F2328"/>
                 </a:solidFill>
               </a:rPr>
-              <a:t>Honesto: </a:t>
+              <a:t>Claridad: </a:t>
             </a:r>
             <a:pPr indent="0" marL="0">
               <a:spcAft>
@@ -14110,7 +14294,7 @@
                   <a:srgbClr val="1F2328"/>
                 </a:solidFill>
               </a:rPr>
-              <a:t>lo ejecutado se separa del diseño empresarial.</a:t>
+              <a:t>se distingue lo ejecutado de lo que queda como diseño.</a:t>
             </a:r>
             <a:endParaRPr lang="en-US" sz="1250" dirty="0"/>
           </a:p>
@@ -14308,7 +14492,7 @@
                 <a:ea typeface="Courier New" pitchFamily="34" charset="-122"/>
                 <a:cs typeface="Courier New" pitchFamily="34" charset="-120"/>
               </a:rPr>
-              <a:t>validate.ps1  (extracto real)</a:t>
+              <a:t>validate.ps1  (extracto del log)</a:t>
             </a:r>
             <a:endParaRPr lang="en-US" sz="900" dirty="0"/>
           </a:p>
@@ -17898,6 +18082,2015 @@
 </p:sld>
 </file>
 
+<file path=ppt/slides/slide20.xml><?xml version="1.0" encoding="utf-8"?>
+<p:sld xmlns:a="http://schemas.openxmlformats.org/drawingml/2006/main" xmlns:r="http://schemas.openxmlformats.org/officeDocument/2006/relationships" xmlns:p="http://schemas.openxmlformats.org/presentationml/2006/main">
+  <p:cSld name="Slide 20">
+    <p:spTree>
+      <p:nvGrpSpPr>
+        <p:cNvPr id="1" name=""/>
+        <p:cNvGrpSpPr/>
+        <p:nvPr/>
+      </p:nvGrpSpPr>
+      <p:grpSpPr>
+        <a:xfrm>
+          <a:off x="0" y="0"/>
+          <a:ext cx="0" cy="0"/>
+          <a:chOff x="0" y="0"/>
+          <a:chExt cx="0" cy="0"/>
+        </a:xfrm>
+      </p:grpSpPr>
+      <p:sp>
+        <p:nvSpPr>
+          <p:cNvPr id="2" name="Text 0"/>
+          <p:cNvSpPr txBox="1"/>
+          <p:nvPr/>
+        </p:nvSpPr>
+        <p:spPr>
+          <a:xfrm>
+            <a:off x="457200" y="182880"/>
+            <a:ext cx="8229600" cy="237744"/>
+          </a:xfrm>
+          <a:prstGeom prst="rect">
+            <a:avLst/>
+          </a:prstGeom>
+          <a:noFill/>
+          <a:ln/>
+        </p:spPr>
+        <p:txBody>
+          <a:bodyPr wrap="square" lIns="0" tIns="0" rIns="0" bIns="0" rtlCol="0" anchor="t"/>
+          <a:lstStyle/>
+          <a:p>
+            <a:pPr indent="0" marL="0">
+              <a:buNone/>
+            </a:pPr>
+            <a:r>
+              <a:rPr lang="en-US" sz="1100" b="1" dirty="0">
+                <a:solidFill>
+                  <a:srgbClr val="D0102B"/>
+                </a:solidFill>
+                <a:latin typeface="Courier New" pitchFamily="34" charset="0"/>
+                <a:ea typeface="Courier New" pitchFamily="34" charset="-122"/>
+                <a:cs typeface="Courier New" pitchFamily="34" charset="-120"/>
+              </a:rPr>
+              <a:t>// A1 </a:t>
+            </a:r>
+            <a:pPr indent="0" marL="0">
+              <a:buNone/>
+            </a:pPr>
+            <a:r>
+              <a:rPr lang="en-US" sz="1100" b="1" dirty="0">
+                <a:solidFill>
+                  <a:srgbClr val="1F2328"/>
+                </a:solidFill>
+                <a:latin typeface="Courier New" pitchFamily="34" charset="0"/>
+                <a:ea typeface="Courier New" pitchFamily="34" charset="-122"/>
+                <a:cs typeface="Courier New" pitchFamily="34" charset="-120"/>
+              </a:rPr>
+              <a:t>ANEXO</a:t>
+            </a:r>
+            <a:pPr indent="0" marL="0">
+              <a:buNone/>
+            </a:pPr>
+            <a:r>
+              <a:rPr lang="en-US" sz="1100" dirty="0">
+                <a:solidFill>
+                  <a:srgbClr val="57606A"/>
+                </a:solidFill>
+                <a:latin typeface="Courier New" pitchFamily="34" charset="0"/>
+                <a:ea typeface="Courier New" pitchFamily="34" charset="-122"/>
+                <a:cs typeface="Courier New" pitchFamily="34" charset="-120"/>
+              </a:rPr>
+              <a:t>  ·  glosario para las preguntas</a:t>
+            </a:r>
+            <a:endParaRPr lang="en-US" sz="1100" dirty="0"/>
+          </a:p>
+        </p:txBody>
+      </p:sp>
+      <p:sp>
+        <p:nvSpPr>
+          <p:cNvPr id="3" name="Text 0"/>
+          <p:cNvSpPr/>
+          <p:nvPr>
+            <p:ph idx="100" type="title" hasCustomPrompt="1"/>
+          </p:nvPr>
+        </p:nvSpPr>
+        <p:spPr>
+          <a:xfrm>
+            <a:off x="457200" y="438912"/>
+            <a:ext cx="8229600" cy="530352"/>
+          </a:xfrm>
+          <a:prstGeom prst="rect">
+            <a:avLst/>
+          </a:prstGeom>
+          <a:noFill/>
+          <a:ln/>
+        </p:spPr>
+        <p:txBody>
+          <a:bodyPr wrap="square" lIns="0" tIns="0" rIns="0" bIns="0" rtlCol="0" anchor="ctr"/>
+          <a:lstStyle/>
+          <a:p>
+            <a:pPr algn="l" indent="0" marL="0">
+              <a:buNone/>
+            </a:pPr>
+            <a:r>
+              <a:rPr lang="en-US" sz="2600" b="1" dirty="0">
+                <a:solidFill>
+                  <a:schemeClr val="tx1"/>
+                </a:solidFill>
+              </a:rPr>
+              <a:t>Términos clave del proyecto</a:t>
+            </a:r>
+            <a:endParaRPr lang="en-US" sz="2600" dirty="0"/>
+          </a:p>
+        </p:txBody>
+      </p:sp>
+      <p:sp>
+        <p:nvSpPr>
+          <p:cNvPr id="4" name="Shape 2"/>
+          <p:cNvSpPr/>
+          <p:nvPr/>
+        </p:nvSpPr>
+        <p:spPr>
+          <a:xfrm>
+            <a:off x="457200" y="1115568"/>
+            <a:ext cx="2651760" cy="640080"/>
+          </a:xfrm>
+          <a:prstGeom prst="roundRect">
+            <a:avLst>
+              <a:gd name="adj" fmla="val 11429"/>
+            </a:avLst>
+          </a:prstGeom>
+          <a:solidFill>
+            <a:srgbClr val="F2F3F5"/>
+          </a:solidFill>
+          <a:ln w="12700">
+            <a:solidFill>
+              <a:srgbClr val="F2F3F5"/>
+            </a:solidFill>
+            <a:prstDash val="solid"/>
+          </a:ln>
+        </p:spPr>
+      </p:sp>
+      <p:sp>
+        <p:nvSpPr>
+          <p:cNvPr id="5" name="Text 3"/>
+          <p:cNvSpPr txBox="1"/>
+          <p:nvPr/>
+        </p:nvSpPr>
+        <p:spPr>
+          <a:xfrm>
+            <a:off x="566928" y="1115568"/>
+            <a:ext cx="2468880" cy="640080"/>
+          </a:xfrm>
+          <a:prstGeom prst="rect">
+            <a:avLst/>
+          </a:prstGeom>
+          <a:noFill/>
+          <a:ln/>
+        </p:spPr>
+        <p:txBody>
+          <a:bodyPr wrap="square" lIns="0" tIns="0" rIns="0" bIns="0" rtlCol="0" anchor="ctr"/>
+          <a:lstStyle/>
+          <a:p>
+            <a:pPr indent="0" marL="0">
+              <a:buNone/>
+            </a:pPr>
+            <a:r>
+              <a:rPr lang="en-US" sz="1150" b="1" dirty="0">
+                <a:solidFill>
+                  <a:srgbClr val="D0102B"/>
+                </a:solidFill>
+              </a:rPr>
+              <a:t>Terraform / HCL</a:t>
+            </a:r>
+            <a:endParaRPr lang="en-US" sz="1150" dirty="0"/>
+          </a:p>
+          <a:p>
+            <a:pPr indent="0" marL="0">
+              <a:buNone/>
+            </a:pPr>
+            <a:r>
+              <a:rPr lang="en-US" sz="1000" dirty="0">
+                <a:solidFill>
+                  <a:srgbClr val="1F2328"/>
+                </a:solidFill>
+              </a:rPr>
+              <a:t>Herramienta de IaC; HCL es su lenguaje (.tf).</a:t>
+            </a:r>
+            <a:endParaRPr lang="en-US" sz="1150" dirty="0"/>
+          </a:p>
+        </p:txBody>
+      </p:sp>
+      <p:sp>
+        <p:nvSpPr>
+          <p:cNvPr id="6" name="Shape 4"/>
+          <p:cNvSpPr/>
+          <p:nvPr/>
+        </p:nvSpPr>
+        <p:spPr>
+          <a:xfrm>
+            <a:off x="3246120" y="1115568"/>
+            <a:ext cx="2651760" cy="640080"/>
+          </a:xfrm>
+          <a:prstGeom prst="roundRect">
+            <a:avLst>
+              <a:gd name="adj" fmla="val 11429"/>
+            </a:avLst>
+          </a:prstGeom>
+          <a:solidFill>
+            <a:srgbClr val="F2F3F5"/>
+          </a:solidFill>
+          <a:ln w="12700">
+            <a:solidFill>
+              <a:srgbClr val="F2F3F5"/>
+            </a:solidFill>
+            <a:prstDash val="solid"/>
+          </a:ln>
+        </p:spPr>
+      </p:sp>
+      <p:sp>
+        <p:nvSpPr>
+          <p:cNvPr id="7" name="Text 5"/>
+          <p:cNvSpPr txBox="1"/>
+          <p:nvPr/>
+        </p:nvSpPr>
+        <p:spPr>
+          <a:xfrm>
+            <a:off x="3355848" y="1115568"/>
+            <a:ext cx="2468880" cy="640080"/>
+          </a:xfrm>
+          <a:prstGeom prst="rect">
+            <a:avLst/>
+          </a:prstGeom>
+          <a:noFill/>
+          <a:ln/>
+        </p:spPr>
+        <p:txBody>
+          <a:bodyPr wrap="square" lIns="0" tIns="0" rIns="0" bIns="0" rtlCol="0" anchor="ctr"/>
+          <a:lstStyle/>
+          <a:p>
+            <a:pPr indent="0" marL="0">
+              <a:buNone/>
+            </a:pPr>
+            <a:r>
+              <a:rPr lang="en-US" sz="1150" b="1" dirty="0">
+                <a:solidFill>
+                  <a:srgbClr val="D0102B"/>
+                </a:solidFill>
+              </a:rPr>
+              <a:t>Módulo</a:t>
+            </a:r>
+            <a:endParaRPr lang="en-US" sz="1150" dirty="0"/>
+          </a:p>
+          <a:p>
+            <a:pPr indent="0" marL="0">
+              <a:buNone/>
+            </a:pPr>
+            <a:r>
+              <a:rPr lang="en-US" sz="1000" dirty="0">
+                <a:solidFill>
+                  <a:srgbClr val="1F2328"/>
+                </a:solidFill>
+              </a:rPr>
+              <a:t>Molde reutilizable: red, servidores, seguridad o monitoreo.</a:t>
+            </a:r>
+            <a:endParaRPr lang="en-US" sz="1150" dirty="0"/>
+          </a:p>
+        </p:txBody>
+      </p:sp>
+      <p:sp>
+        <p:nvSpPr>
+          <p:cNvPr id="8" name="Shape 6"/>
+          <p:cNvSpPr/>
+          <p:nvPr/>
+        </p:nvSpPr>
+        <p:spPr>
+          <a:xfrm>
+            <a:off x="6035040" y="1115568"/>
+            <a:ext cx="2651760" cy="640080"/>
+          </a:xfrm>
+          <a:prstGeom prst="roundRect">
+            <a:avLst>
+              <a:gd name="adj" fmla="val 11429"/>
+            </a:avLst>
+          </a:prstGeom>
+          <a:solidFill>
+            <a:srgbClr val="F2F3F5"/>
+          </a:solidFill>
+          <a:ln w="12700">
+            <a:solidFill>
+              <a:srgbClr val="F2F3F5"/>
+            </a:solidFill>
+            <a:prstDash val="solid"/>
+          </a:ln>
+        </p:spPr>
+      </p:sp>
+      <p:sp>
+        <p:nvSpPr>
+          <p:cNvPr id="9" name="Text 7"/>
+          <p:cNvSpPr txBox="1"/>
+          <p:nvPr/>
+        </p:nvSpPr>
+        <p:spPr>
+          <a:xfrm>
+            <a:off x="6144768" y="1115568"/>
+            <a:ext cx="2468880" cy="640080"/>
+          </a:xfrm>
+          <a:prstGeom prst="rect">
+            <a:avLst/>
+          </a:prstGeom>
+          <a:noFill/>
+          <a:ln/>
+        </p:spPr>
+        <p:txBody>
+          <a:bodyPr wrap="square" lIns="0" tIns="0" rIns="0" bIns="0" rtlCol="0" anchor="ctr"/>
+          <a:lstStyle/>
+          <a:p>
+            <a:pPr indent="0" marL="0">
+              <a:buNone/>
+            </a:pPr>
+            <a:r>
+              <a:rPr lang="en-US" sz="1150" b="1" dirty="0">
+                <a:solidFill>
+                  <a:srgbClr val="D0102B"/>
+                </a:solidFill>
+              </a:rPr>
+              <a:t>branch-stack</a:t>
+            </a:r>
+            <a:endParaRPr lang="en-US" sz="1150" dirty="0"/>
+          </a:p>
+          <a:p>
+            <a:pPr indent="0" marL="0">
+              <a:buNone/>
+            </a:pPr>
+            <a:r>
+              <a:rPr lang="en-US" sz="1000" dirty="0">
+                <a:solidFill>
+                  <a:srgbClr val="1F2328"/>
+                </a:solidFill>
+              </a:rPr>
+              <a:t>Orquestador: aplica los módulos a cada sucursal.</a:t>
+            </a:r>
+            <a:endParaRPr lang="en-US" sz="1150" dirty="0"/>
+          </a:p>
+        </p:txBody>
+      </p:sp>
+      <p:sp>
+        <p:nvSpPr>
+          <p:cNvPr id="10" name="Shape 8"/>
+          <p:cNvSpPr/>
+          <p:nvPr/>
+        </p:nvSpPr>
+        <p:spPr>
+          <a:xfrm>
+            <a:off x="457200" y="1837944"/>
+            <a:ext cx="2651760" cy="640080"/>
+          </a:xfrm>
+          <a:prstGeom prst="roundRect">
+            <a:avLst>
+              <a:gd name="adj" fmla="val 11429"/>
+            </a:avLst>
+          </a:prstGeom>
+          <a:solidFill>
+            <a:srgbClr val="F2F3F5"/>
+          </a:solidFill>
+          <a:ln w="12700">
+            <a:solidFill>
+              <a:srgbClr val="F2F3F5"/>
+            </a:solidFill>
+            <a:prstDash val="solid"/>
+          </a:ln>
+        </p:spPr>
+      </p:sp>
+      <p:sp>
+        <p:nvSpPr>
+          <p:cNvPr id="11" name="Text 9"/>
+          <p:cNvSpPr txBox="1"/>
+          <p:nvPr/>
+        </p:nvSpPr>
+        <p:spPr>
+          <a:xfrm>
+            <a:off x="566928" y="1837944"/>
+            <a:ext cx="2468880" cy="640080"/>
+          </a:xfrm>
+          <a:prstGeom prst="rect">
+            <a:avLst/>
+          </a:prstGeom>
+          <a:noFill/>
+          <a:ln/>
+        </p:spPr>
+        <p:txBody>
+          <a:bodyPr wrap="square" lIns="0" tIns="0" rIns="0" bIns="0" rtlCol="0" anchor="ctr"/>
+          <a:lstStyle/>
+          <a:p>
+            <a:pPr indent="0" marL="0">
+              <a:buNone/>
+            </a:pPr>
+            <a:r>
+              <a:rPr lang="en-US" sz="1150" b="1" dirty="0">
+                <a:solidFill>
+                  <a:srgbClr val="D0102B"/>
+                </a:solidFill>
+              </a:rPr>
+              <a:t>branches.yaml</a:t>
+            </a:r>
+            <a:endParaRPr lang="en-US" sz="1150" dirty="0"/>
+          </a:p>
+          <a:p>
+            <a:pPr indent="0" marL="0">
+              <a:buNone/>
+            </a:pPr>
+            <a:r>
+              <a:rPr lang="en-US" sz="1000" dirty="0">
+                <a:solidFill>
+                  <a:srgbClr val="1F2328"/>
+                </a:solidFill>
+              </a:rPr>
+              <a:t>Datos de las 50 sucursales; no crea nada por sí solo.</a:t>
+            </a:r>
+            <a:endParaRPr lang="en-US" sz="1150" dirty="0"/>
+          </a:p>
+        </p:txBody>
+      </p:sp>
+      <p:sp>
+        <p:nvSpPr>
+          <p:cNvPr id="12" name="Shape 10"/>
+          <p:cNvSpPr/>
+          <p:nvPr/>
+        </p:nvSpPr>
+        <p:spPr>
+          <a:xfrm>
+            <a:off x="3246120" y="1837944"/>
+            <a:ext cx="2651760" cy="640080"/>
+          </a:xfrm>
+          <a:prstGeom prst="roundRect">
+            <a:avLst>
+              <a:gd name="adj" fmla="val 11429"/>
+            </a:avLst>
+          </a:prstGeom>
+          <a:solidFill>
+            <a:srgbClr val="F2F3F5"/>
+          </a:solidFill>
+          <a:ln w="12700">
+            <a:solidFill>
+              <a:srgbClr val="F2F3F5"/>
+            </a:solidFill>
+            <a:prstDash val="solid"/>
+          </a:ln>
+        </p:spPr>
+      </p:sp>
+      <p:sp>
+        <p:nvSpPr>
+          <p:cNvPr id="13" name="Text 11"/>
+          <p:cNvSpPr txBox="1"/>
+          <p:nvPr/>
+        </p:nvSpPr>
+        <p:spPr>
+          <a:xfrm>
+            <a:off x="3355848" y="1837944"/>
+            <a:ext cx="2468880" cy="640080"/>
+          </a:xfrm>
+          <a:prstGeom prst="rect">
+            <a:avLst/>
+          </a:prstGeom>
+          <a:noFill/>
+          <a:ln/>
+        </p:spPr>
+        <p:txBody>
+          <a:bodyPr wrap="square" lIns="0" tIns="0" rIns="0" bIns="0" rtlCol="0" anchor="ctr"/>
+          <a:lstStyle/>
+          <a:p>
+            <a:pPr indent="0" marL="0">
+              <a:buNone/>
+            </a:pPr>
+            <a:r>
+              <a:rPr lang="en-US" sz="1150" b="1" dirty="0">
+                <a:solidFill>
+                  <a:srgbClr val="D0102B"/>
+                </a:solidFill>
+              </a:rPr>
+              <a:t>for_each</a:t>
+            </a:r>
+            <a:endParaRPr lang="en-US" sz="1150" dirty="0"/>
+          </a:p>
+          <a:p>
+            <a:pPr indent="0" marL="0">
+              <a:buNone/>
+            </a:pPr>
+            <a:r>
+              <a:rPr lang="en-US" sz="1000" dirty="0">
+                <a:solidFill>
+                  <a:srgbClr val="1F2328"/>
+                </a:solidFill>
+              </a:rPr>
+              <a:t>Repite un módulo una vez por cada sucursal.</a:t>
+            </a:r>
+            <a:endParaRPr lang="en-US" sz="1150" dirty="0"/>
+          </a:p>
+        </p:txBody>
+      </p:sp>
+      <p:sp>
+        <p:nvSpPr>
+          <p:cNvPr id="14" name="Shape 12"/>
+          <p:cNvSpPr/>
+          <p:nvPr/>
+        </p:nvSpPr>
+        <p:spPr>
+          <a:xfrm>
+            <a:off x="6035040" y="1837944"/>
+            <a:ext cx="2651760" cy="640080"/>
+          </a:xfrm>
+          <a:prstGeom prst="roundRect">
+            <a:avLst>
+              <a:gd name="adj" fmla="val 11429"/>
+            </a:avLst>
+          </a:prstGeom>
+          <a:solidFill>
+            <a:srgbClr val="F2F3F5"/>
+          </a:solidFill>
+          <a:ln w="12700">
+            <a:solidFill>
+              <a:srgbClr val="F2F3F5"/>
+            </a:solidFill>
+            <a:prstDash val="solid"/>
+          </a:ln>
+        </p:spPr>
+      </p:sp>
+      <p:sp>
+        <p:nvSpPr>
+          <p:cNvPr id="15" name="Text 13"/>
+          <p:cNvSpPr txBox="1"/>
+          <p:nvPr/>
+        </p:nvSpPr>
+        <p:spPr>
+          <a:xfrm>
+            <a:off x="6144768" y="1837944"/>
+            <a:ext cx="2468880" cy="640080"/>
+          </a:xfrm>
+          <a:prstGeom prst="rect">
+            <a:avLst/>
+          </a:prstGeom>
+          <a:noFill/>
+          <a:ln/>
+        </p:spPr>
+        <p:txBody>
+          <a:bodyPr wrap="square" lIns="0" tIns="0" rIns="0" bIns="0" rtlCol="0" anchor="ctr"/>
+          <a:lstStyle/>
+          <a:p>
+            <a:pPr indent="0" marL="0">
+              <a:buNone/>
+            </a:pPr>
+            <a:r>
+              <a:rPr lang="en-US" sz="1150" b="1" dirty="0">
+                <a:solidFill>
+                  <a:srgbClr val="D0102B"/>
+                </a:solidFill>
+              </a:rPr>
+              <a:t>VPC</a:t>
+            </a:r>
+            <a:endParaRPr lang="en-US" sz="1150" dirty="0"/>
+          </a:p>
+          <a:p>
+            <a:pPr indent="0" marL="0">
+              <a:buNone/>
+            </a:pPr>
+            <a:r>
+              <a:rPr lang="en-US" sz="1000" dirty="0">
+                <a:solidFill>
+                  <a:srgbClr val="1F2328"/>
+                </a:solidFill>
+              </a:rPr>
+              <a:t>Red privada y aislada de una sucursal en la nube.</a:t>
+            </a:r>
+            <a:endParaRPr lang="en-US" sz="1150" dirty="0"/>
+          </a:p>
+        </p:txBody>
+      </p:sp>
+      <p:sp>
+        <p:nvSpPr>
+          <p:cNvPr id="16" name="Shape 14"/>
+          <p:cNvSpPr/>
+          <p:nvPr/>
+        </p:nvSpPr>
+        <p:spPr>
+          <a:xfrm>
+            <a:off x="457200" y="2560320"/>
+            <a:ext cx="2651760" cy="640080"/>
+          </a:xfrm>
+          <a:prstGeom prst="roundRect">
+            <a:avLst>
+              <a:gd name="adj" fmla="val 11429"/>
+            </a:avLst>
+          </a:prstGeom>
+          <a:solidFill>
+            <a:srgbClr val="F2F3F5"/>
+          </a:solidFill>
+          <a:ln w="12700">
+            <a:solidFill>
+              <a:srgbClr val="F2F3F5"/>
+            </a:solidFill>
+            <a:prstDash val="solid"/>
+          </a:ln>
+        </p:spPr>
+      </p:sp>
+      <p:sp>
+        <p:nvSpPr>
+          <p:cNvPr id="17" name="Text 15"/>
+          <p:cNvSpPr txBox="1"/>
+          <p:nvPr/>
+        </p:nvSpPr>
+        <p:spPr>
+          <a:xfrm>
+            <a:off x="566928" y="2560320"/>
+            <a:ext cx="2468880" cy="640080"/>
+          </a:xfrm>
+          <a:prstGeom prst="rect">
+            <a:avLst/>
+          </a:prstGeom>
+          <a:noFill/>
+          <a:ln/>
+        </p:spPr>
+        <p:txBody>
+          <a:bodyPr wrap="square" lIns="0" tIns="0" rIns="0" bIns="0" rtlCol="0" anchor="ctr"/>
+          <a:lstStyle/>
+          <a:p>
+            <a:pPr indent="0" marL="0">
+              <a:buNone/>
+            </a:pPr>
+            <a:r>
+              <a:rPr lang="en-US" sz="1150" b="1" dirty="0">
+                <a:solidFill>
+                  <a:srgbClr val="D0102B"/>
+                </a:solidFill>
+              </a:rPr>
+              <a:t>Subnet / CIDR</a:t>
+            </a:r>
+            <a:endParaRPr lang="en-US" sz="1150" dirty="0"/>
+          </a:p>
+          <a:p>
+            <a:pPr indent="0" marL="0">
+              <a:buNone/>
+            </a:pPr>
+            <a:r>
+              <a:rPr lang="en-US" sz="1000" dirty="0">
+                <a:solidFill>
+                  <a:srgbClr val="1F2328"/>
+                </a:solidFill>
+              </a:rPr>
+              <a:t>Sección de la red / rango de IPs (10.10.1.0/24).</a:t>
+            </a:r>
+            <a:endParaRPr lang="en-US" sz="1150" dirty="0"/>
+          </a:p>
+        </p:txBody>
+      </p:sp>
+      <p:sp>
+        <p:nvSpPr>
+          <p:cNvPr id="18" name="Shape 16"/>
+          <p:cNvSpPr/>
+          <p:nvPr/>
+        </p:nvSpPr>
+        <p:spPr>
+          <a:xfrm>
+            <a:off x="3246120" y="2560320"/>
+            <a:ext cx="2651760" cy="640080"/>
+          </a:xfrm>
+          <a:prstGeom prst="roundRect">
+            <a:avLst>
+              <a:gd name="adj" fmla="val 11429"/>
+            </a:avLst>
+          </a:prstGeom>
+          <a:solidFill>
+            <a:srgbClr val="F2F3F5"/>
+          </a:solidFill>
+          <a:ln w="12700">
+            <a:solidFill>
+              <a:srgbClr val="F2F3F5"/>
+            </a:solidFill>
+            <a:prstDash val="solid"/>
+          </a:ln>
+        </p:spPr>
+      </p:sp>
+      <p:sp>
+        <p:nvSpPr>
+          <p:cNvPr id="19" name="Text 17"/>
+          <p:cNvSpPr txBox="1"/>
+          <p:nvPr/>
+        </p:nvSpPr>
+        <p:spPr>
+          <a:xfrm>
+            <a:off x="3355848" y="2560320"/>
+            <a:ext cx="2468880" cy="640080"/>
+          </a:xfrm>
+          <a:prstGeom prst="rect">
+            <a:avLst/>
+          </a:prstGeom>
+          <a:noFill/>
+          <a:ln/>
+        </p:spPr>
+        <p:txBody>
+          <a:bodyPr wrap="square" lIns="0" tIns="0" rIns="0" bIns="0" rtlCol="0" anchor="ctr"/>
+          <a:lstStyle/>
+          <a:p>
+            <a:pPr indent="0" marL="0">
+              <a:buNone/>
+            </a:pPr>
+            <a:r>
+              <a:rPr lang="en-US" sz="1150" b="1" dirty="0">
+                <a:solidFill>
+                  <a:srgbClr val="D0102B"/>
+                </a:solidFill>
+              </a:rPr>
+              <a:t>EC2 / Compute Engine</a:t>
+            </a:r>
+            <a:endParaRPr lang="en-US" sz="1150" dirty="0"/>
+          </a:p>
+          <a:p>
+            <a:pPr indent="0" marL="0">
+              <a:buNone/>
+            </a:pPr>
+            <a:r>
+              <a:rPr lang="en-US" sz="1000" dirty="0">
+                <a:solidFill>
+                  <a:srgbClr val="1F2328"/>
+                </a:solidFill>
+              </a:rPr>
+              <a:t>Servidores virtuales de AWS / de GCP.</a:t>
+            </a:r>
+            <a:endParaRPr lang="en-US" sz="1150" dirty="0"/>
+          </a:p>
+        </p:txBody>
+      </p:sp>
+      <p:sp>
+        <p:nvSpPr>
+          <p:cNvPr id="20" name="Shape 18"/>
+          <p:cNvSpPr/>
+          <p:nvPr/>
+        </p:nvSpPr>
+        <p:spPr>
+          <a:xfrm>
+            <a:off x="6035040" y="2560320"/>
+            <a:ext cx="2651760" cy="640080"/>
+          </a:xfrm>
+          <a:prstGeom prst="roundRect">
+            <a:avLst>
+              <a:gd name="adj" fmla="val 11429"/>
+            </a:avLst>
+          </a:prstGeom>
+          <a:solidFill>
+            <a:srgbClr val="F2F3F5"/>
+          </a:solidFill>
+          <a:ln w="12700">
+            <a:solidFill>
+              <a:srgbClr val="F2F3F5"/>
+            </a:solidFill>
+            <a:prstDash val="solid"/>
+          </a:ln>
+        </p:spPr>
+      </p:sp>
+      <p:sp>
+        <p:nvSpPr>
+          <p:cNvPr id="21" name="Text 19"/>
+          <p:cNvSpPr txBox="1"/>
+          <p:nvPr/>
+        </p:nvSpPr>
+        <p:spPr>
+          <a:xfrm>
+            <a:off x="6144768" y="2560320"/>
+            <a:ext cx="2468880" cy="640080"/>
+          </a:xfrm>
+          <a:prstGeom prst="rect">
+            <a:avLst/>
+          </a:prstGeom>
+          <a:noFill/>
+          <a:ln/>
+        </p:spPr>
+        <p:txBody>
+          <a:bodyPr wrap="square" lIns="0" tIns="0" rIns="0" bIns="0" rtlCol="0" anchor="ctr"/>
+          <a:lstStyle/>
+          <a:p>
+            <a:pPr indent="0" marL="0">
+              <a:buNone/>
+            </a:pPr>
+            <a:r>
+              <a:rPr lang="en-US" sz="1150" b="1" dirty="0">
+                <a:solidFill>
+                  <a:srgbClr val="D0102B"/>
+                </a:solidFill>
+              </a:rPr>
+              <a:t>Security Group / Firewall</a:t>
+            </a:r>
+            <a:endParaRPr lang="en-US" sz="1150" dirty="0"/>
+          </a:p>
+          <a:p>
+            <a:pPr indent="0" marL="0">
+              <a:buNone/>
+            </a:pPr>
+            <a:r>
+              <a:rPr lang="en-US" sz="1000" dirty="0">
+                <a:solidFill>
+                  <a:srgbClr val="1F2328"/>
+                </a:solidFill>
+              </a:rPr>
+              <a:t>Reglas de quién puede entrar (80, 443, 22).</a:t>
+            </a:r>
+            <a:endParaRPr lang="en-US" sz="1150" dirty="0"/>
+          </a:p>
+        </p:txBody>
+      </p:sp>
+      <p:sp>
+        <p:nvSpPr>
+          <p:cNvPr id="22" name="Shape 20"/>
+          <p:cNvSpPr/>
+          <p:nvPr/>
+        </p:nvSpPr>
+        <p:spPr>
+          <a:xfrm>
+            <a:off x="457200" y="3282696"/>
+            <a:ext cx="2651760" cy="640080"/>
+          </a:xfrm>
+          <a:prstGeom prst="roundRect">
+            <a:avLst>
+              <a:gd name="adj" fmla="val 11429"/>
+            </a:avLst>
+          </a:prstGeom>
+          <a:solidFill>
+            <a:srgbClr val="F2F3F5"/>
+          </a:solidFill>
+          <a:ln w="12700">
+            <a:solidFill>
+              <a:srgbClr val="F2F3F5"/>
+            </a:solidFill>
+            <a:prstDash val="solid"/>
+          </a:ln>
+        </p:spPr>
+      </p:sp>
+      <p:sp>
+        <p:nvSpPr>
+          <p:cNvPr id="23" name="Text 21"/>
+          <p:cNvSpPr txBox="1"/>
+          <p:nvPr/>
+        </p:nvSpPr>
+        <p:spPr>
+          <a:xfrm>
+            <a:off x="566928" y="3282696"/>
+            <a:ext cx="2468880" cy="640080"/>
+          </a:xfrm>
+          <a:prstGeom prst="rect">
+            <a:avLst/>
+          </a:prstGeom>
+          <a:noFill/>
+          <a:ln/>
+        </p:spPr>
+        <p:txBody>
+          <a:bodyPr wrap="square" lIns="0" tIns="0" rIns="0" bIns="0" rtlCol="0" anchor="ctr"/>
+          <a:lstStyle/>
+          <a:p>
+            <a:pPr indent="0" marL="0">
+              <a:buNone/>
+            </a:pPr>
+            <a:r>
+              <a:rPr lang="en-US" sz="1150" b="1" dirty="0">
+                <a:solidFill>
+                  <a:srgbClr val="D0102B"/>
+                </a:solidFill>
+              </a:rPr>
+              <a:t>CloudWatch / Cloud Monitoring</a:t>
+            </a:r>
+            <a:endParaRPr lang="en-US" sz="1150" dirty="0"/>
+          </a:p>
+          <a:p>
+            <a:pPr indent="0" marL="0">
+              <a:buNone/>
+            </a:pPr>
+            <a:r>
+              <a:rPr lang="en-US" sz="1000" dirty="0">
+                <a:solidFill>
+                  <a:srgbClr val="1F2328"/>
+                </a:solidFill>
+              </a:rPr>
+              <a:t>Monitoreo: alarmas si la CPU sube.</a:t>
+            </a:r>
+            <a:endParaRPr lang="en-US" sz="1150" dirty="0"/>
+          </a:p>
+        </p:txBody>
+      </p:sp>
+      <p:sp>
+        <p:nvSpPr>
+          <p:cNvPr id="24" name="Shape 22"/>
+          <p:cNvSpPr/>
+          <p:nvPr/>
+        </p:nvSpPr>
+        <p:spPr>
+          <a:xfrm>
+            <a:off x="3246120" y="3282696"/>
+            <a:ext cx="2651760" cy="640080"/>
+          </a:xfrm>
+          <a:prstGeom prst="roundRect">
+            <a:avLst>
+              <a:gd name="adj" fmla="val 11429"/>
+            </a:avLst>
+          </a:prstGeom>
+          <a:solidFill>
+            <a:srgbClr val="F2F3F5"/>
+          </a:solidFill>
+          <a:ln w="12700">
+            <a:solidFill>
+              <a:srgbClr val="F2F3F5"/>
+            </a:solidFill>
+            <a:prstDash val="solid"/>
+          </a:ln>
+        </p:spPr>
+      </p:sp>
+      <p:sp>
+        <p:nvSpPr>
+          <p:cNvPr id="25" name="Text 23"/>
+          <p:cNvSpPr txBox="1"/>
+          <p:nvPr/>
+        </p:nvSpPr>
+        <p:spPr>
+          <a:xfrm>
+            <a:off x="3355848" y="3282696"/>
+            <a:ext cx="2468880" cy="640080"/>
+          </a:xfrm>
+          <a:prstGeom prst="rect">
+            <a:avLst/>
+          </a:prstGeom>
+          <a:noFill/>
+          <a:ln/>
+        </p:spPr>
+        <p:txBody>
+          <a:bodyPr wrap="square" lIns="0" tIns="0" rIns="0" bIns="0" rtlCol="0" anchor="ctr"/>
+          <a:lstStyle/>
+          <a:p>
+            <a:pPr indent="0" marL="0">
+              <a:buNone/>
+            </a:pPr>
+            <a:r>
+              <a:rPr lang="en-US" sz="1150" b="1" dirty="0">
+                <a:solidFill>
+                  <a:srgbClr val="D0102B"/>
+                </a:solidFill>
+              </a:rPr>
+              <a:t>State</a:t>
+            </a:r>
+            <a:endParaRPr lang="en-US" sz="1150" dirty="0"/>
+          </a:p>
+          <a:p>
+            <a:pPr indent="0" marL="0">
+              <a:buNone/>
+            </a:pPr>
+            <a:r>
+              <a:rPr lang="en-US" sz="1000" dirty="0">
+                <a:solidFill>
+                  <a:srgbClr val="1F2328"/>
+                </a:solidFill>
+              </a:rPr>
+              <a:t>Inventario de lo que Terraform creó.</a:t>
+            </a:r>
+            <a:endParaRPr lang="en-US" sz="1150" dirty="0"/>
+          </a:p>
+        </p:txBody>
+      </p:sp>
+      <p:sp>
+        <p:nvSpPr>
+          <p:cNvPr id="26" name="Shape 24"/>
+          <p:cNvSpPr/>
+          <p:nvPr/>
+        </p:nvSpPr>
+        <p:spPr>
+          <a:xfrm>
+            <a:off x="6035040" y="3282696"/>
+            <a:ext cx="2651760" cy="640080"/>
+          </a:xfrm>
+          <a:prstGeom prst="roundRect">
+            <a:avLst>
+              <a:gd name="adj" fmla="val 11429"/>
+            </a:avLst>
+          </a:prstGeom>
+          <a:solidFill>
+            <a:srgbClr val="F2F3F5"/>
+          </a:solidFill>
+          <a:ln w="12700">
+            <a:solidFill>
+              <a:srgbClr val="F2F3F5"/>
+            </a:solidFill>
+            <a:prstDash val="solid"/>
+          </a:ln>
+        </p:spPr>
+      </p:sp>
+      <p:sp>
+        <p:nvSpPr>
+          <p:cNvPr id="27" name="Text 25"/>
+          <p:cNvSpPr txBox="1"/>
+          <p:nvPr/>
+        </p:nvSpPr>
+        <p:spPr>
+          <a:xfrm>
+            <a:off x="6144768" y="3282696"/>
+            <a:ext cx="2468880" cy="640080"/>
+          </a:xfrm>
+          <a:prstGeom prst="rect">
+            <a:avLst/>
+          </a:prstGeom>
+          <a:noFill/>
+          <a:ln/>
+        </p:spPr>
+        <p:txBody>
+          <a:bodyPr wrap="square" lIns="0" tIns="0" rIns="0" bIns="0" rtlCol="0" anchor="ctr"/>
+          <a:lstStyle/>
+          <a:p>
+            <a:pPr indent="0" marL="0">
+              <a:buNone/>
+            </a:pPr>
+            <a:r>
+              <a:rPr lang="en-US" sz="1150" b="1" dirty="0">
+                <a:solidFill>
+                  <a:srgbClr val="D0102B"/>
+                </a:solidFill>
+              </a:rPr>
+              <a:t>Drift</a:t>
+            </a:r>
+            <a:endParaRPr lang="en-US" sz="1150" dirty="0"/>
+          </a:p>
+          <a:p>
+            <a:pPr indent="0" marL="0">
+              <a:buNone/>
+            </a:pPr>
+            <a:r>
+              <a:rPr lang="en-US" sz="1000" dirty="0">
+                <a:solidFill>
+                  <a:srgbClr val="1F2328"/>
+                </a:solidFill>
+              </a:rPr>
+              <a:t>Diferencia entre el código y la realidad por cambios a mano.</a:t>
+            </a:r>
+            <a:endParaRPr lang="en-US" sz="1150" dirty="0"/>
+          </a:p>
+        </p:txBody>
+      </p:sp>
+      <p:sp>
+        <p:nvSpPr>
+          <p:cNvPr id="28" name="Shape 26"/>
+          <p:cNvSpPr/>
+          <p:nvPr/>
+        </p:nvSpPr>
+        <p:spPr>
+          <a:xfrm>
+            <a:off x="457200" y="4005072"/>
+            <a:ext cx="2651760" cy="640080"/>
+          </a:xfrm>
+          <a:prstGeom prst="roundRect">
+            <a:avLst>
+              <a:gd name="adj" fmla="val 11429"/>
+            </a:avLst>
+          </a:prstGeom>
+          <a:solidFill>
+            <a:srgbClr val="F2F3F5"/>
+          </a:solidFill>
+          <a:ln w="12700">
+            <a:solidFill>
+              <a:srgbClr val="F2F3F5"/>
+            </a:solidFill>
+            <a:prstDash val="solid"/>
+          </a:ln>
+        </p:spPr>
+      </p:sp>
+      <p:sp>
+        <p:nvSpPr>
+          <p:cNvPr id="29" name="Text 27"/>
+          <p:cNvSpPr txBox="1"/>
+          <p:nvPr/>
+        </p:nvSpPr>
+        <p:spPr>
+          <a:xfrm>
+            <a:off x="566928" y="4005072"/>
+            <a:ext cx="2468880" cy="640080"/>
+          </a:xfrm>
+          <a:prstGeom prst="rect">
+            <a:avLst/>
+          </a:prstGeom>
+          <a:noFill/>
+          <a:ln/>
+        </p:spPr>
+        <p:txBody>
+          <a:bodyPr wrap="square" lIns="0" tIns="0" rIns="0" bIns="0" rtlCol="0" anchor="ctr"/>
+          <a:lstStyle/>
+          <a:p>
+            <a:pPr indent="0" marL="0">
+              <a:buNone/>
+            </a:pPr>
+            <a:r>
+              <a:rPr lang="en-US" sz="1150" b="1" dirty="0">
+                <a:solidFill>
+                  <a:srgbClr val="D0102B"/>
+                </a:solidFill>
+              </a:rPr>
+              <a:t>mock_provider</a:t>
+            </a:r>
+            <a:endParaRPr lang="en-US" sz="1150" dirty="0"/>
+          </a:p>
+          <a:p>
+            <a:pPr indent="0" marL="0">
+              <a:buNone/>
+            </a:pPr>
+            <a:r>
+              <a:rPr lang="en-US" sz="1000" dirty="0">
+                <a:solidFill>
+                  <a:srgbClr val="1F2328"/>
+                </a:solidFill>
+              </a:rPr>
+              <a:t>AWS/GCP simulado para probar sin credenciales.</a:t>
+            </a:r>
+            <a:endParaRPr lang="en-US" sz="1150" dirty="0"/>
+          </a:p>
+        </p:txBody>
+      </p:sp>
+      <p:sp>
+        <p:nvSpPr>
+          <p:cNvPr id="30" name="Shape 28"/>
+          <p:cNvSpPr/>
+          <p:nvPr/>
+        </p:nvSpPr>
+        <p:spPr>
+          <a:xfrm>
+            <a:off x="3246120" y="4005072"/>
+            <a:ext cx="2651760" cy="640080"/>
+          </a:xfrm>
+          <a:prstGeom prst="roundRect">
+            <a:avLst>
+              <a:gd name="adj" fmla="val 11429"/>
+            </a:avLst>
+          </a:prstGeom>
+          <a:solidFill>
+            <a:srgbClr val="F2F3F5"/>
+          </a:solidFill>
+          <a:ln w="12700">
+            <a:solidFill>
+              <a:srgbClr val="F2F3F5"/>
+            </a:solidFill>
+            <a:prstDash val="solid"/>
+          </a:ln>
+        </p:spPr>
+      </p:sp>
+      <p:sp>
+        <p:nvSpPr>
+          <p:cNvPr id="31" name="Text 29"/>
+          <p:cNvSpPr txBox="1"/>
+          <p:nvPr/>
+        </p:nvSpPr>
+        <p:spPr>
+          <a:xfrm>
+            <a:off x="3355848" y="4005072"/>
+            <a:ext cx="2468880" cy="640080"/>
+          </a:xfrm>
+          <a:prstGeom prst="rect">
+            <a:avLst/>
+          </a:prstGeom>
+          <a:noFill/>
+          <a:ln/>
+        </p:spPr>
+        <p:txBody>
+          <a:bodyPr wrap="square" lIns="0" tIns="0" rIns="0" bIns="0" rtlCol="0" anchor="ctr"/>
+          <a:lstStyle/>
+          <a:p>
+            <a:pPr indent="0" marL="0">
+              <a:buNone/>
+            </a:pPr>
+            <a:r>
+              <a:rPr lang="en-US" sz="1150" b="1" dirty="0">
+                <a:solidFill>
+                  <a:srgbClr val="D0102B"/>
+                </a:solidFill>
+              </a:rPr>
+              <a:t>CI/CD · GitHub Actions</a:t>
+            </a:r>
+            <a:endParaRPr lang="en-US" sz="1150" dirty="0"/>
+          </a:p>
+          <a:p>
+            <a:pPr indent="0" marL="0">
+              <a:buNone/>
+            </a:pPr>
+            <a:r>
+              <a:rPr lang="en-US" sz="1000" dirty="0">
+                <a:solidFill>
+                  <a:srgbClr val="1F2328"/>
+                </a:solidFill>
+              </a:rPr>
+              <a:t>Revisiones automáticas en cada cambio.</a:t>
+            </a:r>
+            <a:endParaRPr lang="en-US" sz="1150" dirty="0"/>
+          </a:p>
+        </p:txBody>
+      </p:sp>
+      <p:sp>
+        <p:nvSpPr>
+          <p:cNvPr id="32" name="Shape 30"/>
+          <p:cNvSpPr/>
+          <p:nvPr/>
+        </p:nvSpPr>
+        <p:spPr>
+          <a:xfrm>
+            <a:off x="6035040" y="4005072"/>
+            <a:ext cx="2651760" cy="640080"/>
+          </a:xfrm>
+          <a:prstGeom prst="roundRect">
+            <a:avLst>
+              <a:gd name="adj" fmla="val 11429"/>
+            </a:avLst>
+          </a:prstGeom>
+          <a:solidFill>
+            <a:srgbClr val="F2F3F5"/>
+          </a:solidFill>
+          <a:ln w="12700">
+            <a:solidFill>
+              <a:srgbClr val="F2F3F5"/>
+            </a:solidFill>
+            <a:prstDash val="solid"/>
+          </a:ln>
+        </p:spPr>
+      </p:sp>
+      <p:sp>
+        <p:nvSpPr>
+          <p:cNvPr id="33" name="Text 31"/>
+          <p:cNvSpPr txBox="1"/>
+          <p:nvPr/>
+        </p:nvSpPr>
+        <p:spPr>
+          <a:xfrm>
+            <a:off x="6144768" y="4005072"/>
+            <a:ext cx="2468880" cy="640080"/>
+          </a:xfrm>
+          <a:prstGeom prst="rect">
+            <a:avLst/>
+          </a:prstGeom>
+          <a:noFill/>
+          <a:ln/>
+        </p:spPr>
+        <p:txBody>
+          <a:bodyPr wrap="square" lIns="0" tIns="0" rIns="0" bIns="0" rtlCol="0" anchor="ctr"/>
+          <a:lstStyle/>
+          <a:p>
+            <a:pPr indent="0" marL="0">
+              <a:buNone/>
+            </a:pPr>
+            <a:r>
+              <a:rPr lang="en-US" sz="1150" b="1" dirty="0">
+                <a:solidFill>
+                  <a:srgbClr val="D0102B"/>
+                </a:solidFill>
+              </a:rPr>
+              <a:t>Pull Request</a:t>
+            </a:r>
+            <a:endParaRPr lang="en-US" sz="1150" dirty="0"/>
+          </a:p>
+          <a:p>
+            <a:pPr indent="0" marL="0">
+              <a:buNone/>
+            </a:pPr>
+            <a:r>
+              <a:rPr lang="en-US" sz="1000" dirty="0">
+                <a:solidFill>
+                  <a:srgbClr val="1F2328"/>
+                </a:solidFill>
+              </a:rPr>
+              <a:t>Solicitud para que otro revise antes de unir el cambio.</a:t>
+            </a:r>
+            <a:endParaRPr lang="en-US" sz="1150" dirty="0"/>
+          </a:p>
+        </p:txBody>
+      </p:sp>
+      <p:sp>
+        <p:nvSpPr>
+          <p:cNvPr id="25" name="Slide Number Placeholder 0"/>
+          <p:cNvSpPr>
+            <a:spLocks noGrp="1"/>
+          </p:cNvSpPr>
+          <p:nvPr>
+            <p:ph type="sldNum" sz="quarter" idx="4294967295"/>
+          </p:nvPr>
+        </p:nvSpPr>
+        <p:spPr>
+          <a:xfrm>
+            <a:off x="8229600" y="4800600"/>
+            <a:ext cx="457200" cy="228600"/>
+          </a:xfrm>
+          <a:prstGeom prst="rect">
+            <a:avLst/>
+          </a:prstGeom>
+          <a:extLst>
+            <a:ext uri="{C572A759-6A51-4108-AA02-DFA0A04FC94B}">
+              <ma14:wrappingTextBoxFlag xmlns:ma14="http://schemas.microsoft.com/office/mac/drawingml/2011/main" val="0"/>
+            </a:ext>
+          </a:extLst>
+        </p:spPr>
+        <p:txBody>
+          <a:bodyPr/>
+          <a:lstStyle>
+            <a:lvl1pPr>
+              <a:defRPr sz="900">
+                <a:solidFill>
+                  <a:srgbClr val="8B949E"/>
+                </a:solidFill>
+                <a:latin typeface="Courier New"/>
+                <a:ea typeface="Courier New"/>
+                <a:cs typeface="Courier New"/>
+              </a:defRPr>
+            </a:lvl1pPr>
+          </a:lstStyle>
+          <a:p>
+            <a:pPr algn="r"/>
+            <a:fld id="{F7021451-1387-4CA6-816F-3879F97B5CBC}" type="slidenum">
+              <a:rPr b="0" lang="en-US"/>
+              <a:t>20</a:t>
+            </a:fld>
+            <a:endParaRPr lang="en-US"/>
+          </a:p>
+        </p:txBody>
+      </p:sp>
+    </p:spTree>
+  </p:cSld>
+  <p:clrMapOvr>
+    <a:masterClrMapping/>
+  </p:clrMapOvr>
+</p:sld>
+</file>
+
+<file path=ppt/slides/slide21.xml><?xml version="1.0" encoding="utf-8"?>
+<p:sld xmlns:a="http://schemas.openxmlformats.org/drawingml/2006/main" xmlns:r="http://schemas.openxmlformats.org/officeDocument/2006/relationships" xmlns:p="http://schemas.openxmlformats.org/presentationml/2006/main">
+  <p:cSld name="Slide 21">
+    <p:spTree>
+      <p:nvGrpSpPr>
+        <p:cNvPr id="1" name=""/>
+        <p:cNvGrpSpPr/>
+        <p:nvPr/>
+      </p:nvGrpSpPr>
+      <p:grpSpPr>
+        <a:xfrm>
+          <a:off x="0" y="0"/>
+          <a:ext cx="0" cy="0"/>
+          <a:chOff x="0" y="0"/>
+          <a:chExt cx="0" cy="0"/>
+        </a:xfrm>
+      </p:grpSpPr>
+      <p:sp>
+        <p:nvSpPr>
+          <p:cNvPr id="2" name="Text 0"/>
+          <p:cNvSpPr txBox="1"/>
+          <p:nvPr/>
+        </p:nvSpPr>
+        <p:spPr>
+          <a:xfrm>
+            <a:off x="457200" y="182880"/>
+            <a:ext cx="8229600" cy="237744"/>
+          </a:xfrm>
+          <a:prstGeom prst="rect">
+            <a:avLst/>
+          </a:prstGeom>
+          <a:noFill/>
+          <a:ln/>
+        </p:spPr>
+        <p:txBody>
+          <a:bodyPr wrap="square" lIns="0" tIns="0" rIns="0" bIns="0" rtlCol="0" anchor="t"/>
+          <a:lstStyle/>
+          <a:p>
+            <a:pPr indent="0" marL="0">
+              <a:buNone/>
+            </a:pPr>
+            <a:r>
+              <a:rPr lang="en-US" sz="1100" b="1" dirty="0">
+                <a:solidFill>
+                  <a:srgbClr val="D0102B"/>
+                </a:solidFill>
+                <a:latin typeface="Courier New" pitchFamily="34" charset="0"/>
+                <a:ea typeface="Courier New" pitchFamily="34" charset="-122"/>
+                <a:cs typeface="Courier New" pitchFamily="34" charset="-120"/>
+              </a:rPr>
+              <a:t>// A2 </a:t>
+            </a:r>
+            <a:pPr indent="0" marL="0">
+              <a:buNone/>
+            </a:pPr>
+            <a:r>
+              <a:rPr lang="en-US" sz="1100" b="1" dirty="0">
+                <a:solidFill>
+                  <a:srgbClr val="1F2328"/>
+                </a:solidFill>
+                <a:latin typeface="Courier New" pitchFamily="34" charset="0"/>
+                <a:ea typeface="Courier New" pitchFamily="34" charset="-122"/>
+                <a:cs typeface="Courier New" pitchFamily="34" charset="-120"/>
+              </a:rPr>
+              <a:t>ANEXO</a:t>
+            </a:r>
+            <a:pPr indent="0" marL="0">
+              <a:buNone/>
+            </a:pPr>
+            <a:r>
+              <a:rPr lang="en-US" sz="1100" dirty="0">
+                <a:solidFill>
+                  <a:srgbClr val="57606A"/>
+                </a:solidFill>
+                <a:latin typeface="Courier New" pitchFamily="34" charset="0"/>
+                <a:ea typeface="Courier New" pitchFamily="34" charset="-122"/>
+                <a:cs typeface="Courier New" pitchFamily="34" charset="-120"/>
+              </a:rPr>
+              <a:t>  ·  preguntas probables</a:t>
+            </a:r>
+            <a:endParaRPr lang="en-US" sz="1100" dirty="0"/>
+          </a:p>
+        </p:txBody>
+      </p:sp>
+      <p:sp>
+        <p:nvSpPr>
+          <p:cNvPr id="3" name="Text 0"/>
+          <p:cNvSpPr/>
+          <p:nvPr>
+            <p:ph idx="100" type="title" hasCustomPrompt="1"/>
+          </p:nvPr>
+        </p:nvSpPr>
+        <p:spPr>
+          <a:xfrm>
+            <a:off x="457200" y="438912"/>
+            <a:ext cx="8229600" cy="530352"/>
+          </a:xfrm>
+          <a:prstGeom prst="rect">
+            <a:avLst/>
+          </a:prstGeom>
+          <a:noFill/>
+          <a:ln/>
+        </p:spPr>
+        <p:txBody>
+          <a:bodyPr wrap="square" lIns="0" tIns="0" rIns="0" bIns="0" rtlCol="0" anchor="ctr"/>
+          <a:lstStyle/>
+          <a:p>
+            <a:pPr algn="l" indent="0" marL="0">
+              <a:buNone/>
+            </a:pPr>
+            <a:r>
+              <a:rPr lang="en-US" sz="2600" b="1" dirty="0">
+                <a:solidFill>
+                  <a:schemeClr val="tx1"/>
+                </a:solidFill>
+              </a:rPr>
+              <a:t>Preguntas que puede hacer el docente</a:t>
+            </a:r>
+            <a:endParaRPr lang="en-US" sz="2600" dirty="0"/>
+          </a:p>
+        </p:txBody>
+      </p:sp>
+      <p:sp>
+        <p:nvSpPr>
+          <p:cNvPr id="4" name="Shape 2"/>
+          <p:cNvSpPr/>
+          <p:nvPr/>
+        </p:nvSpPr>
+        <p:spPr>
+          <a:xfrm>
+            <a:off x="457200" y="1115568"/>
+            <a:ext cx="4023360" cy="1078992"/>
+          </a:xfrm>
+          <a:prstGeom prst="roundRect">
+            <a:avLst>
+              <a:gd name="adj" fmla="val 6780"/>
+            </a:avLst>
+          </a:prstGeom>
+          <a:solidFill>
+            <a:srgbClr val="F2F3F5"/>
+          </a:solidFill>
+          <a:ln w="12700">
+            <a:solidFill>
+              <a:srgbClr val="F2F3F5"/>
+            </a:solidFill>
+            <a:prstDash val="solid"/>
+          </a:ln>
+        </p:spPr>
+      </p:sp>
+      <p:sp>
+        <p:nvSpPr>
+          <p:cNvPr id="5" name="Text 3"/>
+          <p:cNvSpPr txBox="1"/>
+          <p:nvPr/>
+        </p:nvSpPr>
+        <p:spPr>
+          <a:xfrm>
+            <a:off x="594360" y="1188720"/>
+            <a:ext cx="3749040" cy="932688"/>
+          </a:xfrm>
+          <a:prstGeom prst="rect">
+            <a:avLst/>
+          </a:prstGeom>
+          <a:noFill/>
+          <a:ln/>
+        </p:spPr>
+        <p:txBody>
+          <a:bodyPr wrap="square" lIns="0" tIns="0" rIns="0" bIns="0" rtlCol="0" anchor="ctr"/>
+          <a:lstStyle/>
+          <a:p>
+            <a:pPr indent="0" marL="0">
+              <a:spcAft>
+                <a:spcPts val="300"/>
+              </a:spcAft>
+              <a:buNone/>
+            </a:pPr>
+            <a:r>
+              <a:rPr lang="en-US" sz="1250" b="1" dirty="0">
+                <a:solidFill>
+                  <a:srgbClr val="D0102B"/>
+                </a:solidFill>
+              </a:rPr>
+              <a:t>¿Por qué no desplegaron en AWS/GCP?</a:t>
+            </a:r>
+            <a:endParaRPr lang="en-US" sz="1250" dirty="0"/>
+          </a:p>
+          <a:p>
+            <a:pPr indent="0" marL="0">
+              <a:spcAft>
+                <a:spcPts val="300"/>
+              </a:spcAft>
+              <a:buNone/>
+            </a:pPr>
+            <a:r>
+              <a:rPr lang="en-US" sz="1100" dirty="0">
+                <a:solidFill>
+                  <a:srgbClr val="1F2328"/>
+                </a:solidFill>
+              </a:rPr>
+              <a:t>No había credenciales y no se podían generar costos; se validó con mock_provider y laboratorios locales.</a:t>
+            </a:r>
+            <a:endParaRPr lang="en-US" sz="1250" dirty="0"/>
+          </a:p>
+        </p:txBody>
+      </p:sp>
+      <p:sp>
+        <p:nvSpPr>
+          <p:cNvPr id="6" name="Shape 4"/>
+          <p:cNvSpPr/>
+          <p:nvPr/>
+        </p:nvSpPr>
+        <p:spPr>
+          <a:xfrm>
+            <a:off x="4663440" y="1115568"/>
+            <a:ext cx="4023360" cy="1078992"/>
+          </a:xfrm>
+          <a:prstGeom prst="roundRect">
+            <a:avLst>
+              <a:gd name="adj" fmla="val 6780"/>
+            </a:avLst>
+          </a:prstGeom>
+          <a:solidFill>
+            <a:srgbClr val="F2F3F5"/>
+          </a:solidFill>
+          <a:ln w="12700">
+            <a:solidFill>
+              <a:srgbClr val="F2F3F5"/>
+            </a:solidFill>
+            <a:prstDash val="solid"/>
+          </a:ln>
+        </p:spPr>
+      </p:sp>
+      <p:sp>
+        <p:nvSpPr>
+          <p:cNvPr id="7" name="Text 5"/>
+          <p:cNvSpPr txBox="1"/>
+          <p:nvPr/>
+        </p:nvSpPr>
+        <p:spPr>
+          <a:xfrm>
+            <a:off x="4800600" y="1188720"/>
+            <a:ext cx="3749040" cy="932688"/>
+          </a:xfrm>
+          <a:prstGeom prst="rect">
+            <a:avLst/>
+          </a:prstGeom>
+          <a:noFill/>
+          <a:ln/>
+        </p:spPr>
+        <p:txBody>
+          <a:bodyPr wrap="square" lIns="0" tIns="0" rIns="0" bIns="0" rtlCol="0" anchor="ctr"/>
+          <a:lstStyle/>
+          <a:p>
+            <a:pPr indent="0" marL="0">
+              <a:spcAft>
+                <a:spcPts val="300"/>
+              </a:spcAft>
+              <a:buNone/>
+            </a:pPr>
+            <a:r>
+              <a:rPr lang="en-US" sz="1250" b="1" dirty="0">
+                <a:solidFill>
+                  <a:srgbClr val="D0102B"/>
+                </a:solidFill>
+              </a:rPr>
+              <a:t>¿Cómo se agrega la sucursal 51?</a:t>
+            </a:r>
+            <a:endParaRPr lang="en-US" sz="1250" dirty="0"/>
+          </a:p>
+          <a:p>
+            <a:pPr indent="0" marL="0">
+              <a:spcAft>
+                <a:spcPts val="300"/>
+              </a:spcAft>
+              <a:buNone/>
+            </a:pPr>
+            <a:r>
+              <a:rPr lang="en-US" sz="1100" dirty="0">
+                <a:solidFill>
+                  <a:srgbClr val="1F2328"/>
+                </a:solidFill>
+              </a:rPr>
+              <a:t>Se añade una entrada a branches.yaml (con el script); ningún archivo .tf cambia (CP15).</a:t>
+            </a:r>
+            <a:endParaRPr lang="en-US" sz="1250" dirty="0"/>
+          </a:p>
+        </p:txBody>
+      </p:sp>
+      <p:sp>
+        <p:nvSpPr>
+          <p:cNvPr id="8" name="Shape 6"/>
+          <p:cNvSpPr/>
+          <p:nvPr/>
+        </p:nvSpPr>
+        <p:spPr>
+          <a:xfrm>
+            <a:off x="457200" y="2304288"/>
+            <a:ext cx="4023360" cy="1078992"/>
+          </a:xfrm>
+          <a:prstGeom prst="roundRect">
+            <a:avLst>
+              <a:gd name="adj" fmla="val 6780"/>
+            </a:avLst>
+          </a:prstGeom>
+          <a:solidFill>
+            <a:srgbClr val="F2F3F5"/>
+          </a:solidFill>
+          <a:ln w="12700">
+            <a:solidFill>
+              <a:srgbClr val="F2F3F5"/>
+            </a:solidFill>
+            <a:prstDash val="solid"/>
+          </a:ln>
+        </p:spPr>
+      </p:sp>
+      <p:sp>
+        <p:nvSpPr>
+          <p:cNvPr id="9" name="Text 7"/>
+          <p:cNvSpPr txBox="1"/>
+          <p:nvPr/>
+        </p:nvSpPr>
+        <p:spPr>
+          <a:xfrm>
+            <a:off x="594360" y="2377440"/>
+            <a:ext cx="3749040" cy="932688"/>
+          </a:xfrm>
+          <a:prstGeom prst="rect">
+            <a:avLst/>
+          </a:prstGeom>
+          <a:noFill/>
+          <a:ln/>
+        </p:spPr>
+        <p:txBody>
+          <a:bodyPr wrap="square" lIns="0" tIns="0" rIns="0" bIns="0" rtlCol="0" anchor="ctr"/>
+          <a:lstStyle/>
+          <a:p>
+            <a:pPr indent="0" marL="0">
+              <a:spcAft>
+                <a:spcPts val="300"/>
+              </a:spcAft>
+              <a:buNone/>
+            </a:pPr>
+            <a:r>
+              <a:rPr lang="en-US" sz="1250" b="1" dirty="0">
+                <a:solidFill>
+                  <a:srgbClr val="B86E00"/>
+                </a:solidFill>
+              </a:rPr>
+              <a:t>¿Por qué una VPC por sucursal?</a:t>
+            </a:r>
+            <a:endParaRPr lang="en-US" sz="1250" dirty="0"/>
+          </a:p>
+          <a:p>
+            <a:pPr indent="0" marL="0">
+              <a:spcAft>
+                <a:spcPts val="300"/>
+              </a:spcAft>
+              <a:buNone/>
+            </a:pPr>
+            <a:r>
+              <a:rPr lang="en-US" sz="1100" dirty="0">
+                <a:solidFill>
+                  <a:srgbClr val="1F2328"/>
+                </a:solidFill>
+              </a:rPr>
+              <a:t>Aislamiento real: un error o ataque en una sucursal no afecta a las demás.</a:t>
+            </a:r>
+            <a:endParaRPr lang="en-US" sz="1250" dirty="0"/>
+          </a:p>
+        </p:txBody>
+      </p:sp>
+      <p:sp>
+        <p:nvSpPr>
+          <p:cNvPr id="10" name="Shape 8"/>
+          <p:cNvSpPr/>
+          <p:nvPr/>
+        </p:nvSpPr>
+        <p:spPr>
+          <a:xfrm>
+            <a:off x="4663440" y="2304288"/>
+            <a:ext cx="4023360" cy="1078992"/>
+          </a:xfrm>
+          <a:prstGeom prst="roundRect">
+            <a:avLst>
+              <a:gd name="adj" fmla="val 6780"/>
+            </a:avLst>
+          </a:prstGeom>
+          <a:solidFill>
+            <a:srgbClr val="F2F3F5"/>
+          </a:solidFill>
+          <a:ln w="12700">
+            <a:solidFill>
+              <a:srgbClr val="F2F3F5"/>
+            </a:solidFill>
+            <a:prstDash val="solid"/>
+          </a:ln>
+        </p:spPr>
+      </p:sp>
+      <p:sp>
+        <p:nvSpPr>
+          <p:cNvPr id="11" name="Text 9"/>
+          <p:cNvSpPr txBox="1"/>
+          <p:nvPr/>
+        </p:nvSpPr>
+        <p:spPr>
+          <a:xfrm>
+            <a:off x="4800600" y="2377440"/>
+            <a:ext cx="3749040" cy="932688"/>
+          </a:xfrm>
+          <a:prstGeom prst="rect">
+            <a:avLst/>
+          </a:prstGeom>
+          <a:noFill/>
+          <a:ln/>
+        </p:spPr>
+        <p:txBody>
+          <a:bodyPr wrap="square" lIns="0" tIns="0" rIns="0" bIns="0" rtlCol="0" anchor="ctr"/>
+          <a:lstStyle/>
+          <a:p>
+            <a:pPr indent="0" marL="0">
+              <a:spcAft>
+                <a:spcPts val="300"/>
+              </a:spcAft>
+              <a:buNone/>
+            </a:pPr>
+            <a:r>
+              <a:rPr lang="en-US" sz="1250" b="1" dirty="0">
+                <a:solidFill>
+                  <a:srgbClr val="1A5FD0"/>
+                </a:solidFill>
+              </a:rPr>
+              <a:t>¿Por qué 25 AWS y 25 GCP?</a:t>
+            </a:r>
+            <a:endParaRPr lang="en-US" sz="1250" dirty="0"/>
+          </a:p>
+          <a:p>
+            <a:pPr indent="0" marL="0">
+              <a:spcAft>
+                <a:spcPts val="300"/>
+              </a:spcAft>
+              <a:buNone/>
+            </a:pPr>
+            <a:r>
+              <a:rPr lang="en-US" sz="1100" dirty="0">
+                <a:solidFill>
+                  <a:srgbClr val="1F2328"/>
+                </a:solidFill>
+              </a:rPr>
+              <a:t>Supuesto académico: impares a AWS, pares a GCP. En la realidad decide el negocio.</a:t>
+            </a:r>
+            <a:endParaRPr lang="en-US" sz="1250" dirty="0"/>
+          </a:p>
+        </p:txBody>
+      </p:sp>
+      <p:sp>
+        <p:nvSpPr>
+          <p:cNvPr id="12" name="Shape 10"/>
+          <p:cNvSpPr/>
+          <p:nvPr/>
+        </p:nvSpPr>
+        <p:spPr>
+          <a:xfrm>
+            <a:off x="457200" y="3493008"/>
+            <a:ext cx="4023360" cy="1078992"/>
+          </a:xfrm>
+          <a:prstGeom prst="roundRect">
+            <a:avLst>
+              <a:gd name="adj" fmla="val 6780"/>
+            </a:avLst>
+          </a:prstGeom>
+          <a:solidFill>
+            <a:srgbClr val="F2F3F5"/>
+          </a:solidFill>
+          <a:ln w="12700">
+            <a:solidFill>
+              <a:srgbClr val="F2F3F5"/>
+            </a:solidFill>
+            <a:prstDash val="solid"/>
+          </a:ln>
+        </p:spPr>
+      </p:sp>
+      <p:sp>
+        <p:nvSpPr>
+          <p:cNvPr id="13" name="Text 11"/>
+          <p:cNvSpPr txBox="1"/>
+          <p:nvPr/>
+        </p:nvSpPr>
+        <p:spPr>
+          <a:xfrm>
+            <a:off x="594360" y="3566160"/>
+            <a:ext cx="3749040" cy="932688"/>
+          </a:xfrm>
+          <a:prstGeom prst="rect">
+            <a:avLst/>
+          </a:prstGeom>
+          <a:noFill/>
+          <a:ln/>
+        </p:spPr>
+        <p:txBody>
+          <a:bodyPr wrap="square" lIns="0" tIns="0" rIns="0" bIns="0" rtlCol="0" anchor="ctr"/>
+          <a:lstStyle/>
+          <a:p>
+            <a:pPr indent="0" marL="0">
+              <a:spcAft>
+                <a:spcPts val="300"/>
+              </a:spcAft>
+              <a:buNone/>
+            </a:pPr>
+            <a:r>
+              <a:rPr lang="en-US" sz="1250" b="1" dirty="0">
+                <a:solidFill>
+                  <a:srgbClr val="9A6B00"/>
+                </a:solidFill>
+              </a:rPr>
+              <a:t>¿Qué pasa si alguien cambia algo a mano?</a:t>
+            </a:r>
+            <a:endParaRPr lang="en-US" sz="1250" dirty="0"/>
+          </a:p>
+          <a:p>
+            <a:pPr indent="0" marL="0">
+              <a:spcAft>
+                <a:spcPts val="300"/>
+              </a:spcAft>
+              <a:buNone/>
+            </a:pPr>
+            <a:r>
+              <a:rPr lang="en-US" sz="1100" dirty="0">
+                <a:solidFill>
+                  <a:srgbClr val="1F2328"/>
+                </a:solidFill>
+              </a:rPr>
+              <a:t>terraform plan lo detecta (drift) y un apply lo devuelve a lo declarado.</a:t>
+            </a:r>
+            <a:endParaRPr lang="en-US" sz="1250" dirty="0"/>
+          </a:p>
+        </p:txBody>
+      </p:sp>
+      <p:sp>
+        <p:nvSpPr>
+          <p:cNvPr id="14" name="Shape 12"/>
+          <p:cNvSpPr/>
+          <p:nvPr/>
+        </p:nvSpPr>
+        <p:spPr>
+          <a:xfrm>
+            <a:off x="4663440" y="3493008"/>
+            <a:ext cx="4023360" cy="1078992"/>
+          </a:xfrm>
+          <a:prstGeom prst="roundRect">
+            <a:avLst>
+              <a:gd name="adj" fmla="val 6780"/>
+            </a:avLst>
+          </a:prstGeom>
+          <a:solidFill>
+            <a:srgbClr val="F2F3F5"/>
+          </a:solidFill>
+          <a:ln w="12700">
+            <a:solidFill>
+              <a:srgbClr val="F2F3F5"/>
+            </a:solidFill>
+            <a:prstDash val="solid"/>
+          </a:ln>
+        </p:spPr>
+      </p:sp>
+      <p:sp>
+        <p:nvSpPr>
+          <p:cNvPr id="15" name="Text 13"/>
+          <p:cNvSpPr txBox="1"/>
+          <p:nvPr/>
+        </p:nvSpPr>
+        <p:spPr>
+          <a:xfrm>
+            <a:off x="4800600" y="3566160"/>
+            <a:ext cx="3749040" cy="932688"/>
+          </a:xfrm>
+          <a:prstGeom prst="rect">
+            <a:avLst/>
+          </a:prstGeom>
+          <a:noFill/>
+          <a:ln/>
+        </p:spPr>
+        <p:txBody>
+          <a:bodyPr wrap="square" lIns="0" tIns="0" rIns="0" bIns="0" rtlCol="0" anchor="ctr"/>
+          <a:lstStyle/>
+          <a:p>
+            <a:pPr indent="0" marL="0">
+              <a:spcAft>
+                <a:spcPts val="300"/>
+              </a:spcAft>
+              <a:buNone/>
+            </a:pPr>
+            <a:r>
+              <a:rPr lang="en-US" sz="1250" b="1" dirty="0">
+                <a:solidFill>
+                  <a:srgbClr val="2DA44E"/>
+                </a:solidFill>
+              </a:rPr>
+              <a:t>¿Cómo evitan subir secretos?</a:t>
+            </a:r>
+            <a:endParaRPr lang="en-US" sz="1250" dirty="0"/>
+          </a:p>
+          <a:p>
+            <a:pPr indent="0" marL="0">
+              <a:spcAft>
+                <a:spcPts val="300"/>
+              </a:spcAft>
+              <a:buNone/>
+            </a:pPr>
+            <a:r>
+              <a:rPr lang="en-US" sz="1100" dirty="0">
+                <a:solidFill>
+                  <a:srgbClr val="1F2328"/>
+                </a:solidFill>
+              </a:rPr>
+              <a:t>.gitignore, gitleaks y una verificación que hace fallar el pipeline.</a:t>
+            </a:r>
+            <a:endParaRPr lang="en-US" sz="1250" dirty="0"/>
+          </a:p>
+        </p:txBody>
+      </p:sp>
+      <p:sp>
+        <p:nvSpPr>
+          <p:cNvPr id="25" name="Slide Number Placeholder 0"/>
+          <p:cNvSpPr>
+            <a:spLocks noGrp="1"/>
+          </p:cNvSpPr>
+          <p:nvPr>
+            <p:ph type="sldNum" sz="quarter" idx="4294967295"/>
+          </p:nvPr>
+        </p:nvSpPr>
+        <p:spPr>
+          <a:xfrm>
+            <a:off x="8229600" y="4800600"/>
+            <a:ext cx="457200" cy="228600"/>
+          </a:xfrm>
+          <a:prstGeom prst="rect">
+            <a:avLst/>
+          </a:prstGeom>
+          <a:extLst>
+            <a:ext uri="{C572A759-6A51-4108-AA02-DFA0A04FC94B}">
+              <ma14:wrappingTextBoxFlag xmlns:ma14="http://schemas.microsoft.com/office/mac/drawingml/2011/main" val="0"/>
+            </a:ext>
+          </a:extLst>
+        </p:spPr>
+        <p:txBody>
+          <a:bodyPr/>
+          <a:lstStyle>
+            <a:lvl1pPr>
+              <a:defRPr sz="900">
+                <a:solidFill>
+                  <a:srgbClr val="8B949E"/>
+                </a:solidFill>
+                <a:latin typeface="Courier New"/>
+                <a:ea typeface="Courier New"/>
+                <a:cs typeface="Courier New"/>
+              </a:defRPr>
+            </a:lvl1pPr>
+          </a:lstStyle>
+          <a:p>
+            <a:pPr algn="r"/>
+            <a:fld id="{F7021451-1387-4CA6-816F-3879F97B5CBC}" type="slidenum">
+              <a:rPr b="0" lang="en-US"/>
+              <a:t>21</a:t>
+            </a:fld>
+            <a:endParaRPr lang="en-US"/>
+          </a:p>
+        </p:txBody>
+      </p:sp>
+    </p:spTree>
+  </p:cSld>
+  <p:clrMapOvr>
+    <a:masterClrMapping/>
+  </p:clrMapOvr>
+</p:sld>
+</file>
+
 <file path=ppt/slides/slide3.xml><?xml version="1.0" encoding="utf-8"?>
 <p:sld xmlns:a="http://schemas.openxmlformats.org/drawingml/2006/main" xmlns:r="http://schemas.openxmlformats.org/officeDocument/2006/relationships" xmlns:p="http://schemas.openxmlformats.org/presentationml/2006/main">
   <p:cSld name="Slide 3">
@@ -23486,7 +25679,7 @@
                   <a:srgbClr val="57606A"/>
                 </a:solidFill>
               </a:rPr>
-              <a:t>EC2</a:t>
+              <a:t>servidores EC2</a:t>
             </a:r>
             <a:endParaRPr lang="en-US" sz="1050" dirty="0"/>
           </a:p>
@@ -23585,7 +25778,7 @@
                   <a:srgbClr val="57606A"/>
                 </a:solidFill>
               </a:rPr>
-              <a:t>reglas SG</a:t>
+              <a:t>reglas de seguridad</a:t>
             </a:r>
             <a:endParaRPr lang="en-US" sz="1050" dirty="0"/>
           </a:p>
@@ -24400,7 +26593,7 @@
                 <a:ea typeface="Courier New" pitchFamily="34" charset="-122"/>
                 <a:cs typeface="Courier New" pitchFamily="34" charset="-120"/>
               </a:rPr>
-              <a:t>terraform test  (extracto real)</a:t>
+              <a:t>terraform test  (extracto del log)</a:t>
             </a:r>
             <a:endParaRPr lang="en-US" sz="900" dirty="0"/>
           </a:p>

--- a/docs/academic/Sustentacion-IaC-50-Sucursales.pptx
+++ b/docs/academic/Sustentacion-IaC-50-Sucursales.pptx
@@ -127,41 +127,41 @@
   <p:extLst>
     <p:ext uri="{521415D9-36F7-43E2-AB2F-B90AF26B5E84}">
       <p14:sectionLst xmlns:p14="http://schemas.microsoft.com/office/powerpoint/2010/main">
-        <p14:section name="Inicio" id="{c6a90a92-6830-1306-c31b-6edecbd20fec}">
+        <p14:section name="Inicio" id="{dd89e060-63c8-9cfa-fdd7-a09543a9eea4}">
           <p14:sldIdLst>
             <p14:sldId id="256"/>
             <p14:sldId id="257"/>
           </p14:sldIdLst>
         </p14:section>
-        <p14:section name="01 Arquitectura" id="{6b26d4e6-1dc8-e92f-80c9-098ceb1e357f}">
+        <p14:section name="01 Arquitectura" id="{94266cca-a300-6ddd-e41f-775b9162dc4b}">
           <p14:sldIdLst>
             <p14:sldId id="258"/>
             <p14:sldId id="259"/>
             <p14:sldId id="260"/>
           </p14:sldIdLst>
         </p14:section>
-        <p14:section name="02 AWS" id="{cb5b761c-8a7a-1ac5-c433-09f4d271c845}">
+        <p14:section name="02 AWS" id="{f47cbde3-416c-2ab8-5720-c3b912a054c8}">
           <p14:sldIdLst>
             <p14:sldId id="261"/>
             <p14:sldId id="262"/>
             <p14:sldId id="263"/>
           </p14:sldIdLst>
         </p14:section>
-        <p14:section name="03 GCP" id="{d4207d7a-f639-bf65-97df-1c3550e29d59}">
+        <p14:section name="03 GCP" id="{4fcb2b68-5f99-5d9c-fe3a-086c53c692cc}">
           <p14:sldIdLst>
             <p14:sldId id="264"/>
             <p14:sldId id="265"/>
             <p14:sldId id="266"/>
           </p14:sldIdLst>
         </p14:section>
-        <p14:section name="04 CI/CD" id="{cca9b098-10ea-f1b0-a558-d87d3ee92735}">
+        <p14:section name="04 CI/CD" id="{d68e05cb-bf76-5bbc-f6a4-c3f377054c17}">
           <p14:sldIdLst>
             <p14:sldId id="267"/>
             <p14:sldId id="268"/>
             <p14:sldId id="269"/>
           </p14:sldIdLst>
         </p14:section>
-        <p14:section name="05 State y Drift" id="{765ca2b6-34dd-ed2c-70a0-3f31d66a2bbe}">
+        <p14:section name="05 State y Drift" id="{f3a646b1-b5b6-297b-1bcc-cf52f1dbabbe}">
           <p14:sldIdLst>
             <p14:sldId id="270"/>
             <p14:sldId id="271"/>
@@ -170,7 +170,7 @@
             <p14:sldId id="274"/>
           </p14:sldIdLst>
         </p14:section>
-        <p14:section name="Anexos" id="{c97a63f0-f1a1-677f-f353-36acfef56440}">
+        <p14:section name="Anexos" id="{74145b75-eadc-5de2-9990-5b69c7fd73d7}">
           <p14:sldIdLst>
             <p14:sldId id="275"/>
             <p14:sldId id="276"/>
@@ -932,7 +932,7 @@
           <a:p>
             <a:r>
               <a:rPr lang="en-US" dirty="0"/>
-              <a:t>HUBER (≈1 min 30 s): Implementé el pipeline en GitHub Actions. Es uno solo para AWS y GCP porque conviven en el mismo branch-stack. En cada cambio corre: formato, validate en los tres entornos, el esquema de las 50 sucursales, las 27 pruebas, TFLint, y en seguridad Checkov y gitleaks. Para aprobar un cambio se trabaja en una rama, se abre un Pull Request, las validaciones deben pasar y un revisor confirma el checklist. Nunca hay apply real porque no hay credenciales; dejamos documentado cómo habilitarlo con OIDC y aprobación manual.</a:t>
+              <a:t>HUBER (≈1 min 30 s): Implementé el pipeline en GitHub Actions. Es uno solo para AWS y GCP porque conviven en el mismo branch-stack. En cada cambio corre: formato, validate en los tres entornos, el esquema de las 50 sucursales, las 27 pruebas, TFLint, y en seguridad Checkov y gitleaks. Para aprobar un cambio se trabaja en una rama, se abre un Pull Request, las validaciones deben pasar y un revisor confirma el checklist. Para el despliegue, la autenticación es con OIDC, sin claves guardadas, y el apply requiere aprobación manual en un GitHub Environment.</a:t>
             </a:r>
             <a:endParaRPr lang="en-US" dirty="0"/>
           </a:p>
@@ -1196,7 +1196,7 @@
           <a:p>
             <a:r>
               <a:rPr lang="en-US" dirty="0"/>
-              <a:t>KAREN (≈1 min): El state es el inventario de lo que Terraform creó. Para una empresa diseñamos backends remotos: S3 con versionado, cifrado y bloqueo en AWS, y GCS con versionado y bloqueo nativo en GCP, con permisos mínimos por entorno. Lo que ejecutamos fue un laboratorio local con todo el ciclo: init, apply, consultar con state list y show, modificar, planificar y destruir (CP12). Y algo clave: el state guarda datos sensibles, por eso nunca se sube a Git.</a:t>
+              <a:t>KAREN (≈1 min): El state es el inventario de lo que Terraform creó. Usamos backends remotos por entorno: S3 con versionado, cifrado y bloqueo en AWS, y GCS con versionado y bloqueo nativo en GCP, con permisos mínimos. Además, el laboratorio local muestra todo el ciclo: init, apply, consultar con state list y show, modificar, planificar y destruir (CP12). Y algo clave: el state guarda datos sensibles, por eso nunca se sube a Git.</a:t>
             </a:r>
             <a:endParaRPr lang="en-US" dirty="0"/>
           </a:p>
@@ -1372,7 +1372,7 @@
           <a:p>
             <a:r>
               <a:rPr lang="en-US" dirty="0"/>
-              <a:t>KAREN (≈1 min): Elaboré el plan de pruebas y reuní las evidencias. Los 16 casos se ejecutaron y aprobaron, las 27 pruebas pasaron, se validaron las 50 sucursales y no hay secretos en el repositorio. A la derecha, la salida real de validate en los tres entornos. Concluimos que la solución escala, que probar sin nube sí aporta porque encontró errores reales, y que siempre separamos lo ejecutado de lo diseñado. La limitación es que no se probó contra las APIs reales. Gracias.</a:t>
+              <a:t>KAREN (≈1 min): Elaboré el plan de pruebas y reuní las evidencias. Los 16 casos se ejecutaron y aprobaron, las 27 pruebas pasaron, se validaron las 50 sucursales y no hay secretos en el repositorio. A la derecha, la salida real de validate en los tres entornos. Concluimos que la solución escala, que las pruebas automatizadas encontraron errores reales a tiempo, que es segura y que es fácil de mantener. Gracias.</a:t>
             </a:r>
             <a:endParaRPr lang="en-US" dirty="0"/>
           </a:p>
@@ -1636,7 +1636,7 @@
           <a:p>
             <a:r>
               <a:rPr lang="en-US" dirty="0"/>
-              <a:t>Anexo de apoyo: no se expone; sirve para responder preguntas del docente sobre terminología.</a:t>
+              <a:t>Anexo de apoyo para explicar la terminología del proyecto.</a:t>
             </a:r>
             <a:endParaRPr lang="en-US" dirty="0"/>
           </a:p>
@@ -1900,7 +1900,7 @@
           <a:p>
             <a:r>
               <a:rPr lang="en-US" dirty="0"/>
-              <a:t>THIAGO (≈1 min): Configurar 50 sucursales a mano genera errores, como los cuadros rojos, no deja auditar y no permite detectar cambios manuales. Nuestra solución tiene un solo archivo de datos, ocho módulos reutilizables y un orquestador; con eso salen 50 sucursales idénticas. La restricción fue no tener credenciales de AWS ni GCP, así que nunca se despliega de verdad: validamos todo con proveedores simulados y laboratorios locales.</a:t>
+              <a:t>THIAGO (≈1 min): Configurar 50 sucursales a mano genera errores, como los cuadros rojos, no deja auditar y no permite detectar cambios manuales. Nuestra solución tiene un solo archivo de datos, ocho módulos reutilizables y un orquestador; con eso salen 50 sucursales idénticas. Además, cada cambio se valida automáticamente con pruebas antes de aplicarse.</a:t>
             </a:r>
             <a:endParaRPr lang="en-US" dirty="0"/>
           </a:p>
@@ -2252,7 +2252,7 @@
           <a:p>
             <a:r>
               <a:rPr lang="en-US" dirty="0"/>
-              <a:t>CARLOS (≈1 min 20 s): Como no había credenciales, probé con terraform test y mock_provider, que simula AWS sin llamadas reales. En la primera corrida falló: yo accedía a route[0] en la tabla de rutas, pero route es un conjunto y no tiene índice. Lo corregí con anytrue, que busca dentro del conjunto la ruta 0.0.0.0/0. A la derecha está la salida real: todas las suites de AWS pasan. Lo importante es que el error se encontró antes de desplegar. Ahora Eddyson con GCP.</a:t>
+              <a:t>CARLOS (≈1 min 20 s): Probé los módulos con terraform test y mock_provider, que simula AWS para probar en segundos. En la primera corrida falló: yo accedía a route[0] en la tabla de rutas, pero route es un conjunto y no tiene índice. Lo corregí con anytrue, que busca dentro del conjunto la ruta 0.0.0.0/0. A la derecha está la salida real: todas las suites de AWS pasan. Lo importante es que el error se encontró antes de aplicar cualquier cambio. Ahora Eddyson con GCP.</a:t>
             </a:r>
             <a:endParaRPr lang="en-US" dirty="0"/>
           </a:p>
@@ -3246,7 +3246,7 @@
                 <a:ea typeface="Courier New" pitchFamily="34" charset="-122"/>
                 <a:cs typeface="Courier New" pitchFamily="34" charset="-120"/>
               </a:rPr>
-              <a:t>  # sin credenciales cloud</a:t>
+              <a:t>  # 27 pruebas automatizadas</a:t>
             </a:r>
             <a:endParaRPr lang="en-US" sz="1200" dirty="0"/>
           </a:p>
@@ -9636,7 +9636,7 @@
                   <a:srgbClr val="1F2328"/>
                 </a:solidFill>
               </a:rPr>
-              <a:t>Merge a main (sin apply real)</a:t>
+              <a:t>Merge a main</a:t>
             </a:r>
             <a:endParaRPr lang="en-US" sz="1250" dirty="0"/>
           </a:p>
@@ -9699,7 +9699,7 @@
                   <a:srgbClr val="FFFFFF"/>
                 </a:solidFill>
               </a:rPr>
-              <a:t>¿Por qué nunca hay apply real?</a:t>
+              <a:t>Despliegue seguro</a:t>
             </a:r>
             <a:endParaRPr lang="en-US" sz="1300" dirty="0"/>
           </a:p>
@@ -9739,7 +9739,7 @@
                   <a:srgbClr val="E6EDF3"/>
                 </a:solidFill>
               </a:rPr>
-              <a:t>Sin credenciales → init -backend=false</a:t>
+              <a:t>OIDC hacia IAM / Workload Identity: sin claves estáticas</a:t>
             </a:r>
             <a:endParaRPr lang="en-US" sz="1200" dirty="0"/>
           </a:p>
@@ -9757,7 +9757,7 @@
                   <a:srgbClr val="E6EDF3"/>
                 </a:solidFill>
               </a:rPr>
-              <a:t>Futuro: OIDC a IAM / Workload Identity, sin claves estáticas</a:t>
+              <a:t>apply solo tras aprobación en GitHub Environment</a:t>
             </a:r>
             <a:endParaRPr lang="en-US" sz="1200" dirty="0"/>
           </a:p>
@@ -9775,25 +9775,7 @@
                   <a:srgbClr val="E6EDF3"/>
                 </a:solidFill>
               </a:rPr>
-              <a:t>apply solo tras aprobación en GitHub Environment</a:t>
-            </a:r>
-            <a:endParaRPr lang="en-US" sz="1200" dirty="0"/>
-          </a:p>
-          <a:p>
-            <a:pPr marL="342900" indent="-342900">
-              <a:spcAft>
-                <a:spcPts val="600"/>
-              </a:spcAft>
-              <a:buSzPct val="100000"/>
-              <a:buChar char="•"/>
-            </a:pPr>
-            <a:r>
-              <a:rPr lang="en-US" sz="1200" dirty="0">
-                <a:solidFill>
-                  <a:srgbClr val="E6EDF3"/>
-                </a:solidFill>
-              </a:rPr>
-              <a:t>Checkov frena configuraciones inseguras antes de desplegar</a:t>
+              <a:t>Checkov frena configuraciones inseguras antes de aplicar</a:t>
             </a:r>
             <a:endParaRPr lang="en-US" sz="1200" dirty="0"/>
           </a:p>
@@ -11836,7 +11818,7 @@
                 <a:ea typeface="Courier New" pitchFamily="34" charset="-122"/>
                 <a:cs typeface="Courier New" pitchFamily="34" charset="-120"/>
               </a:rPr>
-              <a:t>diseño</a:t>
+              <a:t>backend S3</a:t>
             </a:r>
             <a:endParaRPr lang="en-US" sz="1600" dirty="0"/>
           </a:p>
@@ -12007,7 +11989,7 @@
                 <a:ea typeface="Courier New" pitchFamily="34" charset="-122"/>
                 <a:cs typeface="Courier New" pitchFamily="34" charset="-120"/>
               </a:rPr>
-              <a:t>diseño</a:t>
+              <a:t>backend GCS</a:t>
             </a:r>
             <a:endParaRPr lang="en-US" sz="1600" dirty="0"/>
           </a:p>
@@ -12178,7 +12160,7 @@
                 <a:ea typeface="Courier New" pitchFamily="34" charset="-122"/>
                 <a:cs typeface="Courier New" pitchFamily="34" charset="-120"/>
               </a:rPr>
-              <a:t>ejecutado ✓</a:t>
+              <a:t>laboratorio</a:t>
             </a:r>
             <a:endParaRPr lang="en-US" sz="1600" dirty="0"/>
           </a:p>
@@ -14248,7 +14230,7 @@
                   <a:srgbClr val="1F2328"/>
                 </a:solidFill>
               </a:rPr>
-              <a:t>Pruebas útiles sin nube: </a:t>
+              <a:t>Pruebas automatizadas: </a:t>
             </a:r>
             <a:pPr indent="0" marL="0">
               <a:spcAft>
@@ -14280,7 +14262,7 @@
                   <a:srgbClr val="1F2328"/>
                 </a:solidFill>
               </a:rPr>
-              <a:t>Claridad: </a:t>
+              <a:t>Seguro: </a:t>
             </a:r>
             <a:pPr indent="0" marL="0">
               <a:spcAft>
@@ -14294,7 +14276,7 @@
                   <a:srgbClr val="1F2328"/>
                 </a:solidFill>
               </a:rPr>
-              <a:t>se distingue lo ejecutado de lo que queda como diseño.</a:t>
+              <a:t>cero secretos en el repo y revisión por Pull Request.</a:t>
             </a:r>
             <a:endParaRPr lang="en-US" sz="1250" dirty="0"/>
           </a:p>
@@ -14312,7 +14294,7 @@
                   <a:srgbClr val="1F2328"/>
                 </a:solidFill>
               </a:rPr>
-              <a:t>Límite: </a:t>
+              <a:t>Mantenible: </a:t>
             </a:r>
             <a:pPr indent="0" marL="0">
               <a:spcAft>
@@ -14326,7 +14308,7 @@
                   <a:srgbClr val="1F2328"/>
                 </a:solidFill>
               </a:rPr>
-              <a:t>no se probó contra las APIs reales de AWS y GCP.</a:t>
+              <a:t>módulos documentados y reutilizables.</a:t>
             </a:r>
             <a:endParaRPr lang="en-US" sz="1250" dirty="0"/>
           </a:p>
@@ -18160,7 +18142,7 @@
                 <a:ea typeface="Courier New" pitchFamily="34" charset="-122"/>
                 <a:cs typeface="Courier New" pitchFamily="34" charset="-120"/>
               </a:rPr>
-              <a:t>  ·  glosario para las preguntas</a:t>
+              <a:t>  ·  glosario</a:t>
             </a:r>
             <a:endParaRPr lang="en-US" sz="1100" dirty="0"/>
           </a:p>
@@ -19199,7 +19181,7 @@
                   <a:srgbClr val="1F2328"/>
                 </a:solidFill>
               </a:rPr>
-              <a:t>AWS/GCP simulado para probar sin credenciales.</a:t>
+              <a:t>Proveedor simulado para probar los módulos rápido.</a:t>
             </a:r>
             <a:endParaRPr lang="en-US" sz="1150" dirty="0"/>
           </a:p>
@@ -19493,7 +19475,7 @@
                 <a:ea typeface="Courier New" pitchFamily="34" charset="-122"/>
                 <a:cs typeface="Courier New" pitchFamily="34" charset="-120"/>
               </a:rPr>
-              <a:t>  ·  preguntas probables</a:t>
+              <a:t>  ·  preguntas frecuentes</a:t>
             </a:r>
             <a:endParaRPr lang="en-US" sz="1100" dirty="0"/>
           </a:p>
@@ -19531,7 +19513,7 @@
                   <a:schemeClr val="tx1"/>
                 </a:solidFill>
               </a:rPr>
-              <a:t>Preguntas que puede hacer el docente</a:t>
+              <a:t>Preguntas frecuentes</a:t>
             </a:r>
             <a:endParaRPr lang="en-US" sz="2600" dirty="0"/>
           </a:p>
@@ -19597,7 +19579,7 @@
                   <a:srgbClr val="D0102B"/>
                 </a:solidFill>
               </a:rPr>
-              <a:t>¿Por qué no desplegaron en AWS/GCP?</a:t>
+              <a:t>¿Qué es Infraestructura como Código?</a:t>
             </a:r>
             <a:endParaRPr lang="en-US" sz="1250" dirty="0"/>
           </a:p>
@@ -19614,7 +19596,7 @@
                   <a:srgbClr val="1F2328"/>
                 </a:solidFill>
               </a:rPr>
-              <a:t>No había credenciales y no se podían generar costos; se validó con mock_provider y laboratorios locales.</a:t>
+              <a:t>Definir la infraestructura en archivos de texto versionados, en vez de configurarla a mano.</a:t>
             </a:r>
             <a:endParaRPr lang="en-US" sz="1250" dirty="0"/>
           </a:p>
@@ -22489,7 +22471,7 @@
                   <a:srgbClr val="D0102B"/>
                 </a:solidFill>
               </a:rPr>
-              <a:t>Restricción: </a:t>
+              <a:t>Clave: </a:t>
             </a:r>
             <a:pPr indent="0" marL="0">
               <a:buNone/>
@@ -22500,7 +22482,7 @@
                   <a:srgbClr val="1F2328"/>
                 </a:solidFill>
               </a:rPr>
-              <a:t>sin credenciales de AWS ni GCP → nunca hay apply real; todo se valida con mocks y laboratorios locales.</a:t>
+              <a:t>un archivo de datos + 8 módulos; cada cambio se valida automáticamente antes de aplicarse.</a:t>
             </a:r>
             <a:endParaRPr lang="en-US" sz="1250" dirty="0"/>
           </a:p>
@@ -26091,7 +26073,7 @@
                   <a:schemeClr val="tx1"/>
                 </a:solidFill>
               </a:rPr>
-              <a:t>Un error real atrapado antes de desplegar</a:t>
+              <a:t>Un error real detectado por las pruebas</a:t>
             </a:r>
             <a:endParaRPr lang="en-US" sz="2600" dirty="0"/>
           </a:p>
@@ -26427,7 +26409,7 @@
                   <a:srgbClr val="57606A"/>
                 </a:solidFill>
               </a:rPr>
-              <a:t>mock_provider "aws" {} simula AWS: cero llamadas reales, cero costo.</a:t>
+              <a:t>mock_provider "aws" {} simula el proveedor para probar los módulos en segundos.</a:t>
             </a:r>
             <a:endParaRPr lang="en-US" sz="1200" dirty="0"/>
           </a:p>
